--- a/Presentatie/SensorThingsAPI_AbInitio.pptx
+++ b/Presentatie/SensorThingsAPI_AbInitio.pptx
@@ -20763,7 +20763,45 @@
           <a:bodyPr/>
           <a:lstStyle/>
           <a:p>
-            <a:endParaRPr lang="en-US"/>
+            <a:r>
+              <a:rPr lang="en-US" dirty="0"/>
+              <a:t>IoT workflows</a:t>
+            </a:r>
+          </a:p>
+          <a:p>
+            <a:r>
+              <a:rPr lang="en-US" dirty="0"/>
+              <a:t>IoT </a:t>
+            </a:r>
+            <a:r>
+              <a:rPr lang="en-US" dirty="0" err="1"/>
+              <a:t>beperkingen</a:t>
+            </a:r>
+            <a:r>
+              <a:rPr lang="en-US" dirty="0"/>
+              <a:t>, caveat’s</a:t>
+            </a:r>
+          </a:p>
+          <a:p>
+            <a:r>
+              <a:rPr lang="en-US" dirty="0"/>
+              <a:t>STAPI model</a:t>
+            </a:r>
+          </a:p>
+          <a:p>
+            <a:r>
+              <a:rPr lang="en-US" dirty="0" err="1"/>
+              <a:t>Zelf</a:t>
+            </a:r>
+            <a:r>
+              <a:rPr lang="en-US" dirty="0"/>
+              <a:t> </a:t>
+            </a:r>
+            <a:r>
+              <a:rPr lang="en-US" dirty="0" err="1"/>
+              <a:t>opzetten</a:t>
+            </a:r>
+            <a:endParaRPr lang="en-US" dirty="0"/>
           </a:p>
         </p:txBody>
       </p:sp>

--- a/Presentatie/SensorThingsAPI_AbInitio.pptx
+++ b/Presentatie/SensorThingsAPI_AbInitio.pptx
@@ -5,28 +5,29 @@
     <p:sldMasterId id="2147483648" r:id="rId4"/>
   </p:sldMasterIdLst>
   <p:notesMasterIdLst>
-    <p:notesMasterId r:id="rId24"/>
+    <p:notesMasterId r:id="rId25"/>
   </p:notesMasterIdLst>
   <p:sldIdLst>
     <p:sldId id="2076137695" r:id="rId5"/>
     <p:sldId id="2076137683" r:id="rId6"/>
-    <p:sldId id="348" r:id="rId7"/>
-    <p:sldId id="319" r:id="rId8"/>
-    <p:sldId id="2076137699" r:id="rId9"/>
-    <p:sldId id="2076137691" r:id="rId10"/>
-    <p:sldId id="2076137697" r:id="rId11"/>
-    <p:sldId id="2076137685" r:id="rId12"/>
-    <p:sldId id="2076137688" r:id="rId13"/>
-    <p:sldId id="2076137686" r:id="rId14"/>
-    <p:sldId id="2076137687" r:id="rId15"/>
-    <p:sldId id="2076137689" r:id="rId16"/>
-    <p:sldId id="2076137690" r:id="rId17"/>
-    <p:sldId id="2076137692" r:id="rId18"/>
-    <p:sldId id="2076137693" r:id="rId19"/>
-    <p:sldId id="2076137698" r:id="rId20"/>
-    <p:sldId id="2076137696" r:id="rId21"/>
-    <p:sldId id="2076137694" r:id="rId22"/>
-    <p:sldId id="259" r:id="rId23"/>
+    <p:sldId id="2076137700" r:id="rId7"/>
+    <p:sldId id="348" r:id="rId8"/>
+    <p:sldId id="319" r:id="rId9"/>
+    <p:sldId id="2076137699" r:id="rId10"/>
+    <p:sldId id="2076137691" r:id="rId11"/>
+    <p:sldId id="2076137697" r:id="rId12"/>
+    <p:sldId id="2076137685" r:id="rId13"/>
+    <p:sldId id="2076137688" r:id="rId14"/>
+    <p:sldId id="2076137686" r:id="rId15"/>
+    <p:sldId id="2076137687" r:id="rId16"/>
+    <p:sldId id="2076137689" r:id="rId17"/>
+    <p:sldId id="2076137690" r:id="rId18"/>
+    <p:sldId id="2076137692" r:id="rId19"/>
+    <p:sldId id="2076137693" r:id="rId20"/>
+    <p:sldId id="2076137698" r:id="rId21"/>
+    <p:sldId id="2076137696" r:id="rId22"/>
+    <p:sldId id="2076137694" r:id="rId23"/>
+    <p:sldId id="259" r:id="rId24"/>
   </p:sldIdLst>
   <p:sldSz cx="12192000" cy="6858000"/>
   <p:notesSz cx="6858000" cy="9144000"/>
@@ -670,7 +671,7 @@
                 <a:tabLst/>
                 <a:defRPr/>
               </a:pPr>
-              <a:t>4</a:t>
+              <a:t>5</a:t>
             </a:fld>
             <a:endParaRPr kumimoji="0" lang="nl-NL" sz="1200" b="0" i="0" u="none" strike="noStrike" kern="1200" cap="none" spc="0" normalizeH="0" baseline="0" noProof="0">
               <a:ln>
@@ -896,7 +897,7 @@
           <a:p>
             <a:fld id="{C250CE13-1BEF-4160-AAFC-1156D47D2D20}" type="slidenum">
               <a:rPr lang="nl-NL" smtClean="0"/>
-              <a:t>10</a:t>
+              <a:t>11</a:t>
             </a:fld>
             <a:endParaRPr lang="nl-NL"/>
           </a:p>
@@ -1004,7 +1005,7 @@
           <a:p>
             <a:fld id="{C250CE13-1BEF-4160-AAFC-1156D47D2D20}" type="slidenum">
               <a:rPr lang="nl-NL" smtClean="0"/>
-              <a:t>11</a:t>
+              <a:t>12</a:t>
             </a:fld>
             <a:endParaRPr lang="nl-NL"/>
           </a:p>
@@ -1088,7 +1089,7 @@
           <a:p>
             <a:fld id="{C250CE13-1BEF-4160-AAFC-1156D47D2D20}" type="slidenum">
               <a:rPr lang="nl-NL" smtClean="0"/>
-              <a:t>12</a:t>
+              <a:t>13</a:t>
             </a:fld>
             <a:endParaRPr lang="nl-NL"/>
           </a:p>
@@ -19163,12 +19164,10 @@
           <a:bodyPr/>
           <a:lstStyle/>
           <a:p>
-            <a:fld id="{875EA9B3-809F-44BB-B7CF-79FF1B0E462C}" type="datetime2">
-              <a:rPr lang="nl-NL" smtClean="0"/>
-              <a:pPr/>
-              <a:t>woensdag 9 september 2026</a:t>
-            </a:fld>
-            <a:endParaRPr lang="nl-NL" dirty="0"/>
+            <a:r>
+              <a:rPr lang="nl-NL" dirty="0"/>
+              <a:t>10 september 2026</a:t>
+            </a:r>
           </a:p>
         </p:txBody>
       </p:sp>
@@ -19288,6 +19287,274 @@
         <p:cNvPr id="1" name="">
           <a:extLst>
             <a:ext uri="{FF2B5EF4-FFF2-40B4-BE49-F238E27FC236}">
+              <a16:creationId xmlns:a16="http://schemas.microsoft.com/office/drawing/2014/main" id="{8215E91A-8BFF-1795-34EB-EB0AF08307E8}"/>
+            </a:ext>
+          </a:extLst>
+        </p:cNvPr>
+        <p:cNvGrpSpPr/>
+        <p:nvPr/>
+      </p:nvGrpSpPr>
+      <p:grpSpPr>
+        <a:xfrm>
+          <a:off x="0" y="0"/>
+          <a:ext cx="0" cy="0"/>
+          <a:chOff x="0" y="0"/>
+          <a:chExt cx="0" cy="0"/>
+        </a:xfrm>
+      </p:grpSpPr>
+      <p:sp>
+        <p:nvSpPr>
+          <p:cNvPr id="2" name="Title 1">
+            <a:extLst>
+              <a:ext uri="{FF2B5EF4-FFF2-40B4-BE49-F238E27FC236}">
+                <a16:creationId xmlns:a16="http://schemas.microsoft.com/office/drawing/2014/main" id="{D2CFC240-5F5D-62A9-41F2-99F67D54213C}"/>
+              </a:ext>
+            </a:extLst>
+          </p:cNvPr>
+          <p:cNvSpPr>
+            <a:spLocks noGrp="1"/>
+          </p:cNvSpPr>
+          <p:nvPr>
+            <p:ph type="title"/>
+          </p:nvPr>
+        </p:nvSpPr>
+        <p:spPr/>
+        <p:txBody>
+          <a:bodyPr/>
+          <a:lstStyle/>
+          <a:p>
+            <a:r>
+              <a:rPr lang="nl-NL" dirty="0" err="1"/>
+              <a:t>IoT</a:t>
+            </a:r>
+            <a:r>
+              <a:rPr lang="nl-NL" dirty="0"/>
+              <a:t> </a:t>
+            </a:r>
+            <a:r>
+              <a:rPr lang="nl-NL" dirty="0" err="1"/>
+              <a:t>Sensing</a:t>
+            </a:r>
+            <a:r>
+              <a:rPr lang="nl-NL" dirty="0"/>
+              <a:t> - Transmission</a:t>
+            </a:r>
+          </a:p>
+        </p:txBody>
+      </p:sp>
+      <p:sp>
+        <p:nvSpPr>
+          <p:cNvPr id="3" name="Content Placeholder 2">
+            <a:extLst>
+              <a:ext uri="{FF2B5EF4-FFF2-40B4-BE49-F238E27FC236}">
+                <a16:creationId xmlns:a16="http://schemas.microsoft.com/office/drawing/2014/main" id="{800C710A-DF59-EBB8-3041-87346E911D90}"/>
+              </a:ext>
+            </a:extLst>
+          </p:cNvPr>
+          <p:cNvSpPr>
+            <a:spLocks noGrp="1"/>
+          </p:cNvSpPr>
+          <p:nvPr>
+            <p:ph idx="1"/>
+          </p:nvPr>
+        </p:nvSpPr>
+        <p:spPr>
+          <a:xfrm>
+            <a:off x="300038" y="1520825"/>
+            <a:ext cx="11587855" cy="5301130"/>
+          </a:xfrm>
+        </p:spPr>
+        <p:txBody>
+          <a:bodyPr>
+            <a:normAutofit fontScale="92500" lnSpcReduction="20000"/>
+          </a:bodyPr>
+          <a:lstStyle/>
+          <a:p>
+            <a:r>
+              <a:rPr lang="en-US" dirty="0"/>
+              <a:t>Short-Range Wireless </a:t>
+            </a:r>
+          </a:p>
+          <a:p>
+            <a:pPr lvl="1"/>
+            <a:r>
+              <a:rPr lang="nl-NL" noProof="0" dirty="0" err="1"/>
+              <a:t>Wi</a:t>
+            </a:r>
+            <a:r>
+              <a:rPr lang="nl-NL" noProof="0" dirty="0"/>
+              <a:t>-</a:t>
+            </a:r>
+            <a:r>
+              <a:rPr lang="nl-NL" dirty="0" err="1"/>
+              <a:t>Fi</a:t>
+            </a:r>
+            <a:r>
+              <a:rPr lang="nl-NL" dirty="0"/>
+              <a:t> (IEEE 802.11)</a:t>
+            </a:r>
+          </a:p>
+          <a:p>
+            <a:pPr lvl="1"/>
+            <a:r>
+              <a:rPr lang="nl-NL" noProof="0" dirty="0"/>
+              <a:t>Bluetooth</a:t>
+            </a:r>
+          </a:p>
+          <a:p>
+            <a:pPr lvl="1"/>
+            <a:r>
+              <a:rPr lang="en-US" dirty="0"/>
+              <a:t>Zigbee / Z-Wave / Thread</a:t>
+            </a:r>
+          </a:p>
+          <a:p>
+            <a:r>
+              <a:rPr lang="en-US" noProof="0" dirty="0" err="1"/>
+              <a:t>LowPowerWAN</a:t>
+            </a:r>
+            <a:endParaRPr lang="en-US" noProof="0" dirty="0"/>
+          </a:p>
+          <a:p>
+            <a:pPr lvl="1"/>
+            <a:r>
+              <a:rPr lang="en-US" dirty="0" err="1"/>
+              <a:t>LoRaWAN</a:t>
+            </a:r>
+            <a:endParaRPr lang="en-US" dirty="0"/>
+          </a:p>
+          <a:p>
+            <a:pPr lvl="1"/>
+            <a:r>
+              <a:rPr lang="en-US" noProof="0" dirty="0"/>
+              <a:t>NB-IoT</a:t>
+            </a:r>
+          </a:p>
+          <a:p>
+            <a:pPr lvl="1"/>
+            <a:r>
+              <a:rPr lang="en-US" dirty="0"/>
+              <a:t>LTE-M</a:t>
+            </a:r>
+          </a:p>
+          <a:p>
+            <a:pPr lvl="1"/>
+            <a:r>
+              <a:rPr lang="en-US" noProof="0" dirty="0"/>
+              <a:t>Sigfox</a:t>
+            </a:r>
+          </a:p>
+          <a:p>
+            <a:r>
+              <a:rPr lang="en-US" dirty="0" err="1"/>
+              <a:t>Cellulaire</a:t>
+            </a:r>
+            <a:endParaRPr lang="en-US" dirty="0"/>
+          </a:p>
+          <a:p>
+            <a:pPr lvl="1"/>
+            <a:r>
+              <a:rPr lang="en-US" noProof="0" dirty="0"/>
+              <a:t>4G LTE / 5G</a:t>
+            </a:r>
+          </a:p>
+          <a:p>
+            <a:r>
+              <a:rPr lang="nl-NL" noProof="0" dirty="0"/>
+              <a:t>Nabij – </a:t>
+            </a:r>
+            <a:r>
+              <a:rPr lang="en-US" dirty="0" err="1"/>
+              <a:t>Bekabelde</a:t>
+            </a:r>
+            <a:r>
+              <a:rPr lang="en-US" dirty="0"/>
+              <a:t> </a:t>
+            </a:r>
+            <a:r>
+              <a:rPr lang="en-US" dirty="0" err="1"/>
+              <a:t>Netwerken</a:t>
+            </a:r>
+            <a:endParaRPr lang="nl-NL" noProof="0" dirty="0"/>
+          </a:p>
+          <a:p>
+            <a:pPr lvl="1"/>
+            <a:r>
+              <a:rPr lang="en-US" dirty="0"/>
+              <a:t>RFID &amp; NFC</a:t>
+            </a:r>
+          </a:p>
+          <a:p>
+            <a:pPr lvl="1"/>
+            <a:r>
+              <a:rPr lang="en-US" dirty="0"/>
+              <a:t>Ethernet</a:t>
+            </a:r>
+          </a:p>
+          <a:p>
+            <a:pPr lvl="1"/>
+            <a:r>
+              <a:rPr lang="en-US" dirty="0" err="1"/>
+              <a:t>Satelliet</a:t>
+            </a:r>
+            <a:r>
+              <a:rPr lang="en-US" dirty="0"/>
+              <a:t> IoT</a:t>
+            </a:r>
+            <a:endParaRPr lang="nl-NL" noProof="0" dirty="0"/>
+          </a:p>
+        </p:txBody>
+      </p:sp>
+      <p:sp>
+        <p:nvSpPr>
+          <p:cNvPr id="4" name="Slide Number Placeholder 3">
+            <a:extLst>
+              <a:ext uri="{FF2B5EF4-FFF2-40B4-BE49-F238E27FC236}">
+                <a16:creationId xmlns:a16="http://schemas.microsoft.com/office/drawing/2014/main" id="{5A10C5C3-51A7-BA7C-F0A3-1E1B890D9E42}"/>
+              </a:ext>
+            </a:extLst>
+          </p:cNvPr>
+          <p:cNvSpPr>
+            <a:spLocks noGrp="1"/>
+          </p:cNvSpPr>
+          <p:nvPr>
+            <p:ph type="sldNum" sz="quarter" idx="12"/>
+          </p:nvPr>
+        </p:nvSpPr>
+        <p:spPr/>
+        <p:txBody>
+          <a:bodyPr/>
+          <a:lstStyle/>
+          <a:p>
+            <a:fld id="{A648B885-FF76-47CB-8BBD-27E7EBF07CA9}" type="slidenum">
+              <a:rPr lang="nl-NL" smtClean="0"/>
+              <a:t>10</a:t>
+            </a:fld>
+            <a:endParaRPr lang="nl-NL"/>
+          </a:p>
+        </p:txBody>
+      </p:sp>
+    </p:spTree>
+    <p:extLst>
+      <p:ext uri="{BB962C8B-B14F-4D97-AF65-F5344CB8AC3E}">
+        <p14:creationId xmlns:p14="http://schemas.microsoft.com/office/powerpoint/2010/main" val="1296492307"/>
+      </p:ext>
+    </p:extLst>
+  </p:cSld>
+  <p:clrMapOvr>
+    <a:masterClrMapping/>
+  </p:clrMapOvr>
+</p:sld>
+</file>
+
+<file path=ppt/slides/slide11.xml><?xml version="1.0" encoding="utf-8"?>
+<p:sld xmlns:a="http://schemas.openxmlformats.org/drawingml/2006/main" xmlns:r="http://schemas.openxmlformats.org/officeDocument/2006/relationships" xmlns:p="http://schemas.openxmlformats.org/presentationml/2006/main">
+  <p:cSld>
+    <p:spTree>
+      <p:nvGrpSpPr>
+        <p:cNvPr id="1" name="">
+          <a:extLst>
+            <a:ext uri="{FF2B5EF4-FFF2-40B4-BE49-F238E27FC236}">
               <a16:creationId xmlns:a16="http://schemas.microsoft.com/office/drawing/2014/main" id="{BCCBBF02-79E1-D7BB-2928-50C22DBEEF73}"/>
             </a:ext>
           </a:extLst>
@@ -19354,7 +19621,7 @@
           <a:p>
             <a:fld id="{A648B885-FF76-47CB-8BBD-27E7EBF07CA9}" type="slidenum">
               <a:rPr lang="nl-NL" smtClean="0"/>
-              <a:t>10</a:t>
+              <a:t>11</a:t>
             </a:fld>
             <a:endParaRPr lang="nl-NL"/>
           </a:p>
@@ -19416,7 +19683,7 @@
 </p:sld>
 </file>
 
-<file path=ppt/slides/slide11.xml><?xml version="1.0" encoding="utf-8"?>
+<file path=ppt/slides/slide12.xml><?xml version="1.0" encoding="utf-8"?>
 <p:sld xmlns:a="http://schemas.openxmlformats.org/drawingml/2006/main" xmlns:r="http://schemas.openxmlformats.org/officeDocument/2006/relationships" xmlns:p="http://schemas.openxmlformats.org/presentationml/2006/main">
   <p:cSld>
     <p:spTree>
@@ -19490,7 +19757,7 @@
           <a:p>
             <a:fld id="{A648B885-FF76-47CB-8BBD-27E7EBF07CA9}" type="slidenum">
               <a:rPr lang="nl-NL" smtClean="0"/>
-              <a:t>11</a:t>
+              <a:t>12</a:t>
             </a:fld>
             <a:endParaRPr lang="nl-NL"/>
           </a:p>
@@ -19530,121 +19797,6 @@
     <p:extLst>
       <p:ext uri="{BB962C8B-B14F-4D97-AF65-F5344CB8AC3E}">
         <p14:creationId xmlns:p14="http://schemas.microsoft.com/office/powerpoint/2010/main" val="166449154"/>
-      </p:ext>
-    </p:extLst>
-  </p:cSld>
-  <p:clrMapOvr>
-    <a:masterClrMapping/>
-  </p:clrMapOvr>
-</p:sld>
-</file>
-
-<file path=ppt/slides/slide12.xml><?xml version="1.0" encoding="utf-8"?>
-<p:sld xmlns:a="http://schemas.openxmlformats.org/drawingml/2006/main" xmlns:r="http://schemas.openxmlformats.org/officeDocument/2006/relationships" xmlns:p="http://schemas.openxmlformats.org/presentationml/2006/main">
-  <p:cSld>
-    <p:spTree>
-      <p:nvGrpSpPr>
-        <p:cNvPr id="1" name=""/>
-        <p:cNvGrpSpPr/>
-        <p:nvPr/>
-      </p:nvGrpSpPr>
-      <p:grpSpPr>
-        <a:xfrm>
-          <a:off x="0" y="0"/>
-          <a:ext cx="0" cy="0"/>
-          <a:chOff x="0" y="0"/>
-          <a:chExt cx="0" cy="0"/>
-        </a:xfrm>
-      </p:grpSpPr>
-      <p:sp>
-        <p:nvSpPr>
-          <p:cNvPr id="2" name="Title 1">
-            <a:extLst>
-              <a:ext uri="{FF2B5EF4-FFF2-40B4-BE49-F238E27FC236}">
-                <a16:creationId xmlns:a16="http://schemas.microsoft.com/office/drawing/2014/main" id="{D33EC40E-75DE-05A3-CBF3-BBA682144D4D}"/>
-              </a:ext>
-            </a:extLst>
-          </p:cNvPr>
-          <p:cNvSpPr>
-            <a:spLocks noGrp="1"/>
-          </p:cNvSpPr>
-          <p:nvPr>
-            <p:ph type="title"/>
-          </p:nvPr>
-        </p:nvSpPr>
-        <p:spPr/>
-        <p:txBody>
-          <a:bodyPr/>
-          <a:lstStyle/>
-          <a:p>
-            <a:r>
-              <a:rPr lang="en-US" dirty="0"/>
-              <a:t>Demo 13:00</a:t>
-            </a:r>
-          </a:p>
-        </p:txBody>
-      </p:sp>
-      <p:sp>
-        <p:nvSpPr>
-          <p:cNvPr id="3" name="Content Placeholder 2">
-            <a:extLst>
-              <a:ext uri="{FF2B5EF4-FFF2-40B4-BE49-F238E27FC236}">
-                <a16:creationId xmlns:a16="http://schemas.microsoft.com/office/drawing/2014/main" id="{B9B31236-B127-D518-A5D9-E2A01AF84E08}"/>
-              </a:ext>
-            </a:extLst>
-          </p:cNvPr>
-          <p:cNvSpPr>
-            <a:spLocks noGrp="1"/>
-          </p:cNvSpPr>
-          <p:nvPr>
-            <p:ph idx="1"/>
-          </p:nvPr>
-        </p:nvSpPr>
-        <p:spPr/>
-        <p:txBody>
-          <a:bodyPr/>
-          <a:lstStyle/>
-          <a:p>
-            <a:r>
-              <a:rPr lang="en-US" dirty="0"/>
-              <a:t>&lt;Hylke&gt;</a:t>
-            </a:r>
-          </a:p>
-        </p:txBody>
-      </p:sp>
-      <p:sp>
-        <p:nvSpPr>
-          <p:cNvPr id="4" name="Slide Number Placeholder 3">
-            <a:extLst>
-              <a:ext uri="{FF2B5EF4-FFF2-40B4-BE49-F238E27FC236}">
-                <a16:creationId xmlns:a16="http://schemas.microsoft.com/office/drawing/2014/main" id="{F4DC7956-F484-CAA8-5F52-AEB0818AEA72}"/>
-              </a:ext>
-            </a:extLst>
-          </p:cNvPr>
-          <p:cNvSpPr>
-            <a:spLocks noGrp="1"/>
-          </p:cNvSpPr>
-          <p:nvPr>
-            <p:ph type="sldNum" sz="quarter" idx="12"/>
-          </p:nvPr>
-        </p:nvSpPr>
-        <p:spPr/>
-        <p:txBody>
-          <a:bodyPr/>
-          <a:lstStyle/>
-          <a:p>
-            <a:fld id="{A648B885-FF76-47CB-8BBD-27E7EBF07CA9}" type="slidenum">
-              <a:rPr lang="nl-NL" smtClean="0"/>
-              <a:t>12</a:t>
-            </a:fld>
-            <a:endParaRPr lang="nl-NL"/>
-          </a:p>
-        </p:txBody>
-      </p:sp>
-    </p:spTree>
-    <p:extLst>
-      <p:ext uri="{BB962C8B-B14F-4D97-AF65-F5344CB8AC3E}">
-        <p14:creationId xmlns:p14="http://schemas.microsoft.com/office/powerpoint/2010/main" val="356990587"/>
       </p:ext>
     </p:extLst>
   </p:cSld>
@@ -19676,7 +19828,7 @@
           <p:cNvPr id="2" name="Title 1">
             <a:extLst>
               <a:ext uri="{FF2B5EF4-FFF2-40B4-BE49-F238E27FC236}">
-                <a16:creationId xmlns:a16="http://schemas.microsoft.com/office/drawing/2014/main" id="{A854F75B-E3BD-E7CE-1098-23836A361F89}"/>
+                <a16:creationId xmlns:a16="http://schemas.microsoft.com/office/drawing/2014/main" id="{D33EC40E-75DE-05A3-CBF3-BBA682144D4D}"/>
               </a:ext>
             </a:extLst>
           </p:cNvPr>
@@ -19694,7 +19846,7 @@
           <a:p>
             <a:r>
               <a:rPr lang="en-US" dirty="0"/>
-              <a:t>Install your own server</a:t>
+              <a:t>Demo 13:00</a:t>
             </a:r>
           </a:p>
         </p:txBody>
@@ -19704,7 +19856,7 @@
           <p:cNvPr id="3" name="Content Placeholder 2">
             <a:extLst>
               <a:ext uri="{FF2B5EF4-FFF2-40B4-BE49-F238E27FC236}">
-                <a16:creationId xmlns:a16="http://schemas.microsoft.com/office/drawing/2014/main" id="{711911BD-EB80-A08B-6CEC-CB8B7385C099}"/>
+                <a16:creationId xmlns:a16="http://schemas.microsoft.com/office/drawing/2014/main" id="{B9B31236-B127-D518-A5D9-E2A01AF84E08}"/>
               </a:ext>
             </a:extLst>
           </p:cNvPr>
@@ -19722,7 +19874,7 @@
           <a:p>
             <a:r>
               <a:rPr lang="en-US" dirty="0"/>
-              <a:t>FROST using Docker</a:t>
+              <a:t>&lt;Hylke&gt;</a:t>
             </a:r>
           </a:p>
         </p:txBody>
@@ -19732,7 +19884,7 @@
           <p:cNvPr id="4" name="Slide Number Placeholder 3">
             <a:extLst>
               <a:ext uri="{FF2B5EF4-FFF2-40B4-BE49-F238E27FC236}">
-                <a16:creationId xmlns:a16="http://schemas.microsoft.com/office/drawing/2014/main" id="{29EB71CF-A626-3B2C-1EFE-97ED17D5113D}"/>
+                <a16:creationId xmlns:a16="http://schemas.microsoft.com/office/drawing/2014/main" id="{F4DC7956-F484-CAA8-5F52-AEB0818AEA72}"/>
               </a:ext>
             </a:extLst>
           </p:cNvPr>
@@ -19751,6 +19903,121 @@
             <a:fld id="{A648B885-FF76-47CB-8BBD-27E7EBF07CA9}" type="slidenum">
               <a:rPr lang="nl-NL" smtClean="0"/>
               <a:t>13</a:t>
+            </a:fld>
+            <a:endParaRPr lang="nl-NL"/>
+          </a:p>
+        </p:txBody>
+      </p:sp>
+    </p:spTree>
+    <p:extLst>
+      <p:ext uri="{BB962C8B-B14F-4D97-AF65-F5344CB8AC3E}">
+        <p14:creationId xmlns:p14="http://schemas.microsoft.com/office/powerpoint/2010/main" val="356990587"/>
+      </p:ext>
+    </p:extLst>
+  </p:cSld>
+  <p:clrMapOvr>
+    <a:masterClrMapping/>
+  </p:clrMapOvr>
+</p:sld>
+</file>
+
+<file path=ppt/slides/slide14.xml><?xml version="1.0" encoding="utf-8"?>
+<p:sld xmlns:a="http://schemas.openxmlformats.org/drawingml/2006/main" xmlns:r="http://schemas.openxmlformats.org/officeDocument/2006/relationships" xmlns:p="http://schemas.openxmlformats.org/presentationml/2006/main">
+  <p:cSld>
+    <p:spTree>
+      <p:nvGrpSpPr>
+        <p:cNvPr id="1" name=""/>
+        <p:cNvGrpSpPr/>
+        <p:nvPr/>
+      </p:nvGrpSpPr>
+      <p:grpSpPr>
+        <a:xfrm>
+          <a:off x="0" y="0"/>
+          <a:ext cx="0" cy="0"/>
+          <a:chOff x="0" y="0"/>
+          <a:chExt cx="0" cy="0"/>
+        </a:xfrm>
+      </p:grpSpPr>
+      <p:sp>
+        <p:nvSpPr>
+          <p:cNvPr id="2" name="Title 1">
+            <a:extLst>
+              <a:ext uri="{FF2B5EF4-FFF2-40B4-BE49-F238E27FC236}">
+                <a16:creationId xmlns:a16="http://schemas.microsoft.com/office/drawing/2014/main" id="{A854F75B-E3BD-E7CE-1098-23836A361F89}"/>
+              </a:ext>
+            </a:extLst>
+          </p:cNvPr>
+          <p:cNvSpPr>
+            <a:spLocks noGrp="1"/>
+          </p:cNvSpPr>
+          <p:nvPr>
+            <p:ph type="title"/>
+          </p:nvPr>
+        </p:nvSpPr>
+        <p:spPr/>
+        <p:txBody>
+          <a:bodyPr/>
+          <a:lstStyle/>
+          <a:p>
+            <a:r>
+              <a:rPr lang="en-US" dirty="0"/>
+              <a:t>Install your own server</a:t>
+            </a:r>
+          </a:p>
+        </p:txBody>
+      </p:sp>
+      <p:sp>
+        <p:nvSpPr>
+          <p:cNvPr id="3" name="Content Placeholder 2">
+            <a:extLst>
+              <a:ext uri="{FF2B5EF4-FFF2-40B4-BE49-F238E27FC236}">
+                <a16:creationId xmlns:a16="http://schemas.microsoft.com/office/drawing/2014/main" id="{711911BD-EB80-A08B-6CEC-CB8B7385C099}"/>
+              </a:ext>
+            </a:extLst>
+          </p:cNvPr>
+          <p:cNvSpPr>
+            <a:spLocks noGrp="1"/>
+          </p:cNvSpPr>
+          <p:nvPr>
+            <p:ph idx="1"/>
+          </p:nvPr>
+        </p:nvSpPr>
+        <p:spPr/>
+        <p:txBody>
+          <a:bodyPr/>
+          <a:lstStyle/>
+          <a:p>
+            <a:r>
+              <a:rPr lang="en-US" dirty="0"/>
+              <a:t>FROST using Docker</a:t>
+            </a:r>
+          </a:p>
+        </p:txBody>
+      </p:sp>
+      <p:sp>
+        <p:nvSpPr>
+          <p:cNvPr id="4" name="Slide Number Placeholder 3">
+            <a:extLst>
+              <a:ext uri="{FF2B5EF4-FFF2-40B4-BE49-F238E27FC236}">
+                <a16:creationId xmlns:a16="http://schemas.microsoft.com/office/drawing/2014/main" id="{29EB71CF-A626-3B2C-1EFE-97ED17D5113D}"/>
+              </a:ext>
+            </a:extLst>
+          </p:cNvPr>
+          <p:cNvSpPr>
+            <a:spLocks noGrp="1"/>
+          </p:cNvSpPr>
+          <p:nvPr>
+            <p:ph type="sldNum" sz="quarter" idx="12"/>
+          </p:nvPr>
+        </p:nvSpPr>
+        <p:spPr/>
+        <p:txBody>
+          <a:bodyPr/>
+          <a:lstStyle/>
+          <a:p>
+            <a:fld id="{A648B885-FF76-47CB-8BBD-27E7EBF07CA9}" type="slidenum">
+              <a:rPr lang="nl-NL" smtClean="0"/>
+              <a:t>14</a:t>
             </a:fld>
             <a:endParaRPr lang="nl-NL"/>
           </a:p>
@@ -19901,7 +20168,7 @@
 </p:sld>
 </file>
 
-<file path=ppt/slides/slide14.xml><?xml version="1.0" encoding="utf-8"?>
+<file path=ppt/slides/slide15.xml><?xml version="1.0" encoding="utf-8"?>
 <p:sld xmlns:a="http://schemas.openxmlformats.org/drawingml/2006/main" xmlns:r="http://schemas.openxmlformats.org/officeDocument/2006/relationships" xmlns:p="http://schemas.openxmlformats.org/presentationml/2006/main">
   <p:cSld>
     <p:spTree>
@@ -20033,7 +20300,7 @@
           <a:p>
             <a:fld id="{A648B885-FF76-47CB-8BBD-27E7EBF07CA9}" type="slidenum">
               <a:rPr lang="nl-NL" smtClean="0"/>
-              <a:t>14</a:t>
+              <a:t>15</a:t>
             </a:fld>
             <a:endParaRPr lang="nl-NL"/>
           </a:p>
@@ -20052,7 +20319,7 @@
 </p:sld>
 </file>
 
-<file path=ppt/slides/slide15.xml><?xml version="1.0" encoding="utf-8"?>
+<file path=ppt/slides/slide16.xml><?xml version="1.0" encoding="utf-8"?>
 <p:sld xmlns:a="http://schemas.openxmlformats.org/drawingml/2006/main" xmlns:r="http://schemas.openxmlformats.org/officeDocument/2006/relationships" xmlns:p="http://schemas.openxmlformats.org/presentationml/2006/main">
   <p:cSld>
     <p:spTree>
@@ -20216,7 +20483,7 @@
           <a:p>
             <a:fld id="{A648B885-FF76-47CB-8BBD-27E7EBF07CA9}" type="slidenum">
               <a:rPr lang="nl-NL" smtClean="0"/>
-              <a:t>15</a:t>
+              <a:t>16</a:t>
             </a:fld>
             <a:endParaRPr lang="nl-NL"/>
           </a:p>
@@ -20235,7 +20502,7 @@
 </p:sld>
 </file>
 
-<file path=ppt/slides/slide16.xml><?xml version="1.0" encoding="utf-8"?>
+<file path=ppt/slides/slide17.xml><?xml version="1.0" encoding="utf-8"?>
 <p:sld xmlns:a="http://schemas.openxmlformats.org/drawingml/2006/main" xmlns:r="http://schemas.openxmlformats.org/officeDocument/2006/relationships" xmlns:p="http://schemas.openxmlformats.org/presentationml/2006/main">
   <p:cSld>
     <p:spTree>
@@ -20427,7 +20694,7 @@
           <a:p>
             <a:fld id="{A648B885-FF76-47CB-8BBD-27E7EBF07CA9}" type="slidenum">
               <a:rPr lang="nl-NL" smtClean="0"/>
-              <a:t>16</a:t>
+              <a:t>17</a:t>
             </a:fld>
             <a:endParaRPr lang="nl-NL"/>
           </a:p>
@@ -20446,7 +20713,7 @@
 </p:sld>
 </file>
 
-<file path=ppt/slides/slide17.xml><?xml version="1.0" encoding="utf-8"?>
+<file path=ppt/slides/slide18.xml><?xml version="1.0" encoding="utf-8"?>
 <p:sld xmlns:a="http://schemas.openxmlformats.org/drawingml/2006/main" xmlns:r="http://schemas.openxmlformats.org/officeDocument/2006/relationships" xmlns:p="http://schemas.openxmlformats.org/presentationml/2006/main">
   <p:cSld>
     <p:spTree>
@@ -20678,7 +20945,7 @@
           <a:p>
             <a:fld id="{A648B885-FF76-47CB-8BBD-27E7EBF07CA9}" type="slidenum">
               <a:rPr lang="nl-NL" smtClean="0"/>
-              <a:t>17</a:t>
+              <a:t>18</a:t>
             </a:fld>
             <a:endParaRPr lang="nl-NL"/>
           </a:p>
@@ -20688,156 +20955,6 @@
     <p:extLst>
       <p:ext uri="{BB962C8B-B14F-4D97-AF65-F5344CB8AC3E}">
         <p14:creationId xmlns:p14="http://schemas.microsoft.com/office/powerpoint/2010/main" val="384597157"/>
-      </p:ext>
-    </p:extLst>
-  </p:cSld>
-  <p:clrMapOvr>
-    <a:masterClrMapping/>
-  </p:clrMapOvr>
-</p:sld>
-</file>
-
-<file path=ppt/slides/slide18.xml><?xml version="1.0" encoding="utf-8"?>
-<p:sld xmlns:a="http://schemas.openxmlformats.org/drawingml/2006/main" xmlns:r="http://schemas.openxmlformats.org/officeDocument/2006/relationships" xmlns:p="http://schemas.openxmlformats.org/presentationml/2006/main">
-  <p:cSld>
-    <p:spTree>
-      <p:nvGrpSpPr>
-        <p:cNvPr id="1" name=""/>
-        <p:cNvGrpSpPr/>
-        <p:nvPr/>
-      </p:nvGrpSpPr>
-      <p:grpSpPr>
-        <a:xfrm>
-          <a:off x="0" y="0"/>
-          <a:ext cx="0" cy="0"/>
-          <a:chOff x="0" y="0"/>
-          <a:chExt cx="0" cy="0"/>
-        </a:xfrm>
-      </p:grpSpPr>
-      <p:sp>
-        <p:nvSpPr>
-          <p:cNvPr id="2" name="Title 1">
-            <a:extLst>
-              <a:ext uri="{FF2B5EF4-FFF2-40B4-BE49-F238E27FC236}">
-                <a16:creationId xmlns:a16="http://schemas.microsoft.com/office/drawing/2014/main" id="{FE815C9A-8599-C71B-BE8E-E7C42B13FB2B}"/>
-              </a:ext>
-            </a:extLst>
-          </p:cNvPr>
-          <p:cNvSpPr>
-            <a:spLocks noGrp="1"/>
-          </p:cNvSpPr>
-          <p:nvPr>
-            <p:ph type="title"/>
-          </p:nvPr>
-        </p:nvSpPr>
-        <p:spPr/>
-        <p:txBody>
-          <a:bodyPr/>
-          <a:lstStyle/>
-          <a:p>
-            <a:r>
-              <a:rPr lang="en-US" dirty="0"/>
-              <a:t>Recap</a:t>
-            </a:r>
-          </a:p>
-        </p:txBody>
-      </p:sp>
-      <p:sp>
-        <p:nvSpPr>
-          <p:cNvPr id="3" name="Content Placeholder 2">
-            <a:extLst>
-              <a:ext uri="{FF2B5EF4-FFF2-40B4-BE49-F238E27FC236}">
-                <a16:creationId xmlns:a16="http://schemas.microsoft.com/office/drawing/2014/main" id="{89BB4037-9883-F300-4F98-72D6FB26472C}"/>
-              </a:ext>
-            </a:extLst>
-          </p:cNvPr>
-          <p:cNvSpPr>
-            <a:spLocks noGrp="1"/>
-          </p:cNvSpPr>
-          <p:nvPr>
-            <p:ph idx="1"/>
-          </p:nvPr>
-        </p:nvSpPr>
-        <p:spPr/>
-        <p:txBody>
-          <a:bodyPr/>
-          <a:lstStyle/>
-          <a:p>
-            <a:r>
-              <a:rPr lang="en-US" dirty="0"/>
-              <a:t>IoT workflows</a:t>
-            </a:r>
-          </a:p>
-          <a:p>
-            <a:r>
-              <a:rPr lang="en-US" dirty="0"/>
-              <a:t>IoT </a:t>
-            </a:r>
-            <a:r>
-              <a:rPr lang="en-US" dirty="0" err="1"/>
-              <a:t>beperkingen</a:t>
-            </a:r>
-            <a:r>
-              <a:rPr lang="en-US" dirty="0"/>
-              <a:t>, caveat’s</a:t>
-            </a:r>
-          </a:p>
-          <a:p>
-            <a:r>
-              <a:rPr lang="en-US" dirty="0"/>
-              <a:t>STAPI model</a:t>
-            </a:r>
-          </a:p>
-          <a:p>
-            <a:r>
-              <a:rPr lang="en-US" dirty="0" err="1"/>
-              <a:t>Zelf</a:t>
-            </a:r>
-            <a:r>
-              <a:rPr lang="en-US" dirty="0"/>
-              <a:t> </a:t>
-            </a:r>
-            <a:r>
-              <a:rPr lang="en-US" dirty="0" err="1"/>
-              <a:t>opzetten</a:t>
-            </a:r>
-            <a:endParaRPr lang="en-US" dirty="0"/>
-          </a:p>
-        </p:txBody>
-      </p:sp>
-      <p:sp>
-        <p:nvSpPr>
-          <p:cNvPr id="4" name="Slide Number Placeholder 3">
-            <a:extLst>
-              <a:ext uri="{FF2B5EF4-FFF2-40B4-BE49-F238E27FC236}">
-                <a16:creationId xmlns:a16="http://schemas.microsoft.com/office/drawing/2014/main" id="{20EAEDCC-8E06-57BA-685F-9A04A6171CE5}"/>
-              </a:ext>
-            </a:extLst>
-          </p:cNvPr>
-          <p:cNvSpPr>
-            <a:spLocks noGrp="1"/>
-          </p:cNvSpPr>
-          <p:nvPr>
-            <p:ph type="sldNum" sz="quarter" idx="12"/>
-          </p:nvPr>
-        </p:nvSpPr>
-        <p:spPr/>
-        <p:txBody>
-          <a:bodyPr/>
-          <a:lstStyle/>
-          <a:p>
-            <a:fld id="{A648B885-FF76-47CB-8BBD-27E7EBF07CA9}" type="slidenum">
-              <a:rPr lang="nl-NL" smtClean="0"/>
-              <a:t>18</a:t>
-            </a:fld>
-            <a:endParaRPr lang="nl-NL"/>
-          </a:p>
-        </p:txBody>
-      </p:sp>
-    </p:spTree>
-    <p:extLst>
-      <p:ext uri="{BB962C8B-B14F-4D97-AF65-F5344CB8AC3E}">
-        <p14:creationId xmlns:p14="http://schemas.microsoft.com/office/powerpoint/2010/main" val="4061818679"/>
       </p:ext>
     </p:extLst>
   </p:cSld>
@@ -20866,10 +20983,10 @@
       </p:grpSpPr>
       <p:sp>
         <p:nvSpPr>
-          <p:cNvPr id="4" name="Titel 3">
-            <a:extLst>
-              <a:ext uri="{FF2B5EF4-FFF2-40B4-BE49-F238E27FC236}">
-                <a16:creationId xmlns:a16="http://schemas.microsoft.com/office/drawing/2014/main" id="{CACBE8CC-58DC-1303-F27C-EB90E74D6549}"/>
+          <p:cNvPr id="2" name="Title 1">
+            <a:extLst>
+              <a:ext uri="{FF2B5EF4-FFF2-40B4-BE49-F238E27FC236}">
+                <a16:creationId xmlns:a16="http://schemas.microsoft.com/office/drawing/2014/main" id="{FE815C9A-8599-C71B-BE8E-E7C42B13FB2B}"/>
               </a:ext>
             </a:extLst>
           </p:cNvPr>
@@ -20886,16 +21003,108 @@
           <a:lstStyle/>
           <a:p>
             <a:r>
-              <a:rPr lang="nl-NL" dirty="0"/>
-              <a:t>Bedankt!</a:t>
-            </a:r>
+              <a:rPr lang="en-US" dirty="0"/>
+              <a:t>Recap</a:t>
+            </a:r>
+          </a:p>
+        </p:txBody>
+      </p:sp>
+      <p:sp>
+        <p:nvSpPr>
+          <p:cNvPr id="3" name="Content Placeholder 2">
+            <a:extLst>
+              <a:ext uri="{FF2B5EF4-FFF2-40B4-BE49-F238E27FC236}">
+                <a16:creationId xmlns:a16="http://schemas.microsoft.com/office/drawing/2014/main" id="{89BB4037-9883-F300-4F98-72D6FB26472C}"/>
+              </a:ext>
+            </a:extLst>
+          </p:cNvPr>
+          <p:cNvSpPr>
+            <a:spLocks noGrp="1"/>
+          </p:cNvSpPr>
+          <p:nvPr>
+            <p:ph idx="1"/>
+          </p:nvPr>
+        </p:nvSpPr>
+        <p:spPr/>
+        <p:txBody>
+          <a:bodyPr/>
+          <a:lstStyle/>
+          <a:p>
+            <a:r>
+              <a:rPr lang="en-US" dirty="0"/>
+              <a:t>IoT workflows</a:t>
+            </a:r>
+          </a:p>
+          <a:p>
+            <a:r>
+              <a:rPr lang="en-US" dirty="0"/>
+              <a:t>IoT </a:t>
+            </a:r>
+            <a:r>
+              <a:rPr lang="en-US" dirty="0" err="1"/>
+              <a:t>beperkingen</a:t>
+            </a:r>
+            <a:r>
+              <a:rPr lang="en-US" dirty="0"/>
+              <a:t>, caveat’s</a:t>
+            </a:r>
+          </a:p>
+          <a:p>
+            <a:r>
+              <a:rPr lang="en-US" dirty="0"/>
+              <a:t>STAPI model</a:t>
+            </a:r>
+          </a:p>
+          <a:p>
+            <a:r>
+              <a:rPr lang="en-US" dirty="0" err="1"/>
+              <a:t>Zelf</a:t>
+            </a:r>
+            <a:r>
+              <a:rPr lang="en-US" dirty="0"/>
+              <a:t> </a:t>
+            </a:r>
+            <a:r>
+              <a:rPr lang="en-US" dirty="0" err="1"/>
+              <a:t>opzetten</a:t>
+            </a:r>
+            <a:endParaRPr lang="en-US" dirty="0"/>
+          </a:p>
+        </p:txBody>
+      </p:sp>
+      <p:sp>
+        <p:nvSpPr>
+          <p:cNvPr id="4" name="Slide Number Placeholder 3">
+            <a:extLst>
+              <a:ext uri="{FF2B5EF4-FFF2-40B4-BE49-F238E27FC236}">
+                <a16:creationId xmlns:a16="http://schemas.microsoft.com/office/drawing/2014/main" id="{20EAEDCC-8E06-57BA-685F-9A04A6171CE5}"/>
+              </a:ext>
+            </a:extLst>
+          </p:cNvPr>
+          <p:cNvSpPr>
+            <a:spLocks noGrp="1"/>
+          </p:cNvSpPr>
+          <p:nvPr>
+            <p:ph type="sldNum" sz="quarter" idx="12"/>
+          </p:nvPr>
+        </p:nvSpPr>
+        <p:spPr/>
+        <p:txBody>
+          <a:bodyPr/>
+          <a:lstStyle/>
+          <a:p>
+            <a:fld id="{A648B885-FF76-47CB-8BBD-27E7EBF07CA9}" type="slidenum">
+              <a:rPr lang="nl-NL" smtClean="0"/>
+              <a:t>19</a:t>
+            </a:fld>
+            <a:endParaRPr lang="nl-NL"/>
           </a:p>
         </p:txBody>
       </p:sp>
     </p:spTree>
     <p:extLst>
       <p:ext uri="{BB962C8B-B14F-4D97-AF65-F5344CB8AC3E}">
-        <p14:creationId xmlns:p14="http://schemas.microsoft.com/office/powerpoint/2010/main" val="430122001"/>
+        <p14:creationId xmlns:p14="http://schemas.microsoft.com/office/powerpoint/2010/main" val="4061818679"/>
       </p:ext>
     </p:extLst>
   </p:cSld>
@@ -21118,6 +21327,64 @@
 </p:sld>
 </file>
 
+<file path=ppt/slides/slide20.xml><?xml version="1.0" encoding="utf-8"?>
+<p:sld xmlns:a="http://schemas.openxmlformats.org/drawingml/2006/main" xmlns:r="http://schemas.openxmlformats.org/officeDocument/2006/relationships" xmlns:p="http://schemas.openxmlformats.org/presentationml/2006/main">
+  <p:cSld>
+    <p:spTree>
+      <p:nvGrpSpPr>
+        <p:cNvPr id="1" name=""/>
+        <p:cNvGrpSpPr/>
+        <p:nvPr/>
+      </p:nvGrpSpPr>
+      <p:grpSpPr>
+        <a:xfrm>
+          <a:off x="0" y="0"/>
+          <a:ext cx="0" cy="0"/>
+          <a:chOff x="0" y="0"/>
+          <a:chExt cx="0" cy="0"/>
+        </a:xfrm>
+      </p:grpSpPr>
+      <p:sp>
+        <p:nvSpPr>
+          <p:cNvPr id="4" name="Titel 3">
+            <a:extLst>
+              <a:ext uri="{FF2B5EF4-FFF2-40B4-BE49-F238E27FC236}">
+                <a16:creationId xmlns:a16="http://schemas.microsoft.com/office/drawing/2014/main" id="{CACBE8CC-58DC-1303-F27C-EB90E74D6549}"/>
+              </a:ext>
+            </a:extLst>
+          </p:cNvPr>
+          <p:cNvSpPr>
+            <a:spLocks noGrp="1"/>
+          </p:cNvSpPr>
+          <p:nvPr>
+            <p:ph type="title"/>
+          </p:nvPr>
+        </p:nvSpPr>
+        <p:spPr/>
+        <p:txBody>
+          <a:bodyPr/>
+          <a:lstStyle/>
+          <a:p>
+            <a:r>
+              <a:rPr lang="nl-NL" dirty="0"/>
+              <a:t>Bedankt!</a:t>
+            </a:r>
+          </a:p>
+        </p:txBody>
+      </p:sp>
+    </p:spTree>
+    <p:extLst>
+      <p:ext uri="{BB962C8B-B14F-4D97-AF65-F5344CB8AC3E}">
+        <p14:creationId xmlns:p14="http://schemas.microsoft.com/office/powerpoint/2010/main" val="430122001"/>
+      </p:ext>
+    </p:extLst>
+  </p:cSld>
+  <p:clrMapOvr>
+    <a:masterClrMapping/>
+  </p:clrMapOvr>
+</p:sld>
+</file>
+
 <file path=ppt/slides/slide3.xml><?xml version="1.0" encoding="utf-8"?>
 <p:sld xmlns:a="http://schemas.openxmlformats.org/drawingml/2006/main" xmlns:r="http://schemas.openxmlformats.org/officeDocument/2006/relationships" xmlns:p="http://schemas.openxmlformats.org/presentationml/2006/main">
   <p:cSld>
@@ -21137,10 +21404,10 @@
       </p:grpSpPr>
       <p:sp>
         <p:nvSpPr>
-          <p:cNvPr id="6" name="Titel 5">
-            <a:extLst>
-              <a:ext uri="{FF2B5EF4-FFF2-40B4-BE49-F238E27FC236}">
-                <a16:creationId xmlns:a16="http://schemas.microsoft.com/office/drawing/2014/main" id="{5C14EEB9-ACEB-88AD-E05E-2E9A8A69CBD5}"/>
+          <p:cNvPr id="2" name="Title 1">
+            <a:extLst>
+              <a:ext uri="{FF2B5EF4-FFF2-40B4-BE49-F238E27FC236}">
+                <a16:creationId xmlns:a16="http://schemas.microsoft.com/office/drawing/2014/main" id="{F97C885F-66E3-521C-5FBD-3B258C53D216}"/>
               </a:ext>
             </a:extLst>
           </p:cNvPr>
@@ -21149,171 +21416,6 @@
           </p:cNvSpPr>
           <p:nvPr>
             <p:ph type="title"/>
-          </p:nvPr>
-        </p:nvSpPr>
-        <p:spPr>
-          <a:xfrm>
-            <a:off x="364585" y="150608"/>
-            <a:ext cx="9780132" cy="1280159"/>
-          </a:xfrm>
-        </p:spPr>
-        <p:txBody>
-          <a:bodyPr>
-            <a:normAutofit/>
-          </a:bodyPr>
-          <a:lstStyle/>
-          <a:p>
-            <a:r>
-              <a:rPr lang="nl-NL" dirty="0"/>
-              <a:t>Waarom OGC </a:t>
-            </a:r>
-            <a:r>
-              <a:rPr lang="nl-NL" dirty="0" err="1"/>
-              <a:t>API’s</a:t>
-            </a:r>
-            <a:r>
-              <a:rPr lang="nl-NL" dirty="0"/>
-              <a:t> ?</a:t>
-            </a:r>
-          </a:p>
-        </p:txBody>
-      </p:sp>
-      <p:sp>
-        <p:nvSpPr>
-          <p:cNvPr id="7" name="Tijdelijke aanduiding voor inhoud 6">
-            <a:extLst>
-              <a:ext uri="{FF2B5EF4-FFF2-40B4-BE49-F238E27FC236}">
-                <a16:creationId xmlns:a16="http://schemas.microsoft.com/office/drawing/2014/main" id="{3E8A6620-23F4-508B-17BB-C3AC9048D7AD}"/>
-              </a:ext>
-            </a:extLst>
-          </p:cNvPr>
-          <p:cNvSpPr>
-            <a:spLocks noGrp="1"/>
-          </p:cNvSpPr>
-          <p:nvPr>
-            <p:ph idx="1"/>
-          </p:nvPr>
-        </p:nvSpPr>
-        <p:spPr>
-          <a:xfrm>
-            <a:off x="228600" y="1704976"/>
-            <a:ext cx="11963400" cy="4932363"/>
-          </a:xfrm>
-        </p:spPr>
-        <p:txBody>
-          <a:bodyPr>
-            <a:normAutofit/>
-          </a:bodyPr>
-          <a:lstStyle/>
-          <a:p>
-            <a:r>
-              <a:rPr lang="nl-NL" dirty="0"/>
-              <a:t>Makkelijker dan oude generatie services voor web-ontwikkelaars buiten het </a:t>
-            </a:r>
-            <a:r>
-              <a:rPr lang="nl-NL" dirty="0" err="1"/>
-              <a:t>geodomein</a:t>
-            </a:r>
-            <a:endParaRPr lang="nl-NL" dirty="0"/>
-          </a:p>
-          <a:p>
-            <a:pPr lvl="1"/>
-            <a:r>
-              <a:rPr lang="nl-NL" dirty="0"/>
-              <a:t>Je hoeft geen GIS-specialist te zijn om er mee te werken;</a:t>
-            </a:r>
-          </a:p>
-          <a:p>
-            <a:pPr lvl="1"/>
-            <a:r>
-              <a:rPr lang="nl-NL" dirty="0"/>
-              <a:t>Ook goed te gebruiken binnen het </a:t>
-            </a:r>
-            <a:r>
-              <a:rPr lang="nl-NL" dirty="0" err="1"/>
-              <a:t>geodomein</a:t>
-            </a:r>
-            <a:r>
-              <a:rPr lang="nl-NL" dirty="0"/>
-              <a:t>;</a:t>
-            </a:r>
-          </a:p>
-          <a:p>
-            <a:pPr lvl="1"/>
-            <a:r>
-              <a:rPr lang="nl-NL" dirty="0" err="1"/>
-              <a:t>Openapi</a:t>
-            </a:r>
-            <a:r>
-              <a:rPr lang="nl-NL" dirty="0"/>
-              <a:t> specificatie beschrijft wat er mee kan;</a:t>
-            </a:r>
-          </a:p>
-          <a:p>
-            <a:pPr lvl="1"/>
-            <a:r>
-              <a:rPr lang="nl-NL" dirty="0"/>
-              <a:t>Werkt heel intuïtief.</a:t>
-            </a:r>
-          </a:p>
-          <a:p>
-            <a:endParaRPr lang="nl-NL" dirty="0"/>
-          </a:p>
-          <a:p>
-            <a:r>
-              <a:rPr lang="nl-NL" dirty="0"/>
-              <a:t>Beter te vinden door zoekmachines</a:t>
-            </a:r>
-          </a:p>
-          <a:p>
-            <a:endParaRPr lang="nl-NL" dirty="0"/>
-          </a:p>
-          <a:p>
-            <a:r>
-              <a:rPr lang="nl-NL" dirty="0"/>
-              <a:t>Verschillende types hebben dezelfde structuur en zijn daardoor ook eenvoudiger te combineren.</a:t>
-            </a:r>
-          </a:p>
-          <a:p>
-            <a:endParaRPr lang="nl-NL" dirty="0"/>
-          </a:p>
-          <a:p>
-            <a:pPr marL="0" indent="0">
-              <a:buNone/>
-            </a:pPr>
-            <a:endParaRPr lang="nl-NL" dirty="0"/>
-          </a:p>
-          <a:p>
-            <a:endParaRPr lang="nl-NL" dirty="0"/>
-          </a:p>
-          <a:p>
-            <a:pPr marL="0" indent="0">
-              <a:buNone/>
-            </a:pPr>
-            <a:endParaRPr lang="nl-NL" dirty="0"/>
-          </a:p>
-          <a:p>
-            <a:pPr marL="0" indent="0">
-              <a:buNone/>
-            </a:pPr>
-            <a:endParaRPr lang="nl-NL" dirty="0"/>
-          </a:p>
-        </p:txBody>
-      </p:sp>
-      <p:sp>
-        <p:nvSpPr>
-          <p:cNvPr id="5" name="Tijdelijke aanduiding voor dianummer 4">
-            <a:extLst>
-              <a:ext uri="{FF2B5EF4-FFF2-40B4-BE49-F238E27FC236}">
-                <a16:creationId xmlns:a16="http://schemas.microsoft.com/office/drawing/2014/main" id="{5AC528AC-652C-B32B-D213-8BFAA63CC35A}"/>
-              </a:ext>
-            </a:extLst>
-          </p:cNvPr>
-          <p:cNvSpPr>
-            <a:spLocks noGrp="1"/>
-          </p:cNvSpPr>
-          <p:nvPr>
-            <p:ph type="sldNum" sz="quarter" idx="12"/>
           </p:nvPr>
         </p:nvSpPr>
         <p:spPr/>
@@ -21321,78 +21423,130 @@
           <a:bodyPr/>
           <a:lstStyle/>
           <a:p>
-            <a:pPr marL="0" marR="0" lvl="0" indent="0" algn="r" defTabSz="914400" rtl="0" eaLnBrk="1" fontAlgn="auto" latinLnBrk="0" hangingPunct="1">
-              <a:lnSpc>
-                <a:spcPct val="100000"/>
-              </a:lnSpc>
-              <a:spcBef>
-                <a:spcPts val="0"/>
-              </a:spcBef>
-              <a:spcAft>
-                <a:spcPts val="0"/>
-              </a:spcAft>
-              <a:buClrTx/>
-              <a:buSzTx/>
-              <a:buFontTx/>
-              <a:buNone/>
-              <a:tabLst/>
-              <a:defRPr/>
-            </a:pPr>
+            <a:r>
+              <a:rPr lang="en-US" dirty="0"/>
+              <a:t>Pre-work</a:t>
+            </a:r>
+          </a:p>
+        </p:txBody>
+      </p:sp>
+      <p:sp>
+        <p:nvSpPr>
+          <p:cNvPr id="3" name="Content Placeholder 2">
+            <a:extLst>
+              <a:ext uri="{FF2B5EF4-FFF2-40B4-BE49-F238E27FC236}">
+                <a16:creationId xmlns:a16="http://schemas.microsoft.com/office/drawing/2014/main" id="{D788D6C9-BE4E-7DE2-120C-D3AEC4666C4E}"/>
+              </a:ext>
+            </a:extLst>
+          </p:cNvPr>
+          <p:cNvSpPr>
+            <a:spLocks noGrp="1"/>
+          </p:cNvSpPr>
+          <p:nvPr>
+            <p:ph idx="1"/>
+          </p:nvPr>
+        </p:nvSpPr>
+        <p:spPr/>
+        <p:txBody>
+          <a:bodyPr/>
+          <a:lstStyle/>
+          <a:p>
+            <a:r>
+              <a:rPr lang="en-US" dirty="0"/>
+              <a:t>Als je </a:t>
+            </a:r>
+            <a:r>
+              <a:rPr lang="en-US" dirty="0" err="1"/>
+              <a:t>zelf</a:t>
+            </a:r>
+            <a:r>
+              <a:rPr lang="en-US" dirty="0"/>
+              <a:t> </a:t>
+            </a:r>
+            <a:r>
+              <a:rPr lang="en-US" dirty="0" err="1"/>
+              <a:t>wil</a:t>
+            </a:r>
+            <a:r>
+              <a:rPr lang="en-US" dirty="0"/>
+              <a:t> </a:t>
+            </a:r>
+            <a:r>
+              <a:rPr lang="en-US" dirty="0" err="1"/>
+              <a:t>meespelen</a:t>
+            </a:r>
+            <a:r>
+              <a:rPr lang="en-US" dirty="0"/>
+              <a:t> </a:t>
+            </a:r>
+            <a:r>
+              <a:rPr lang="en-US" dirty="0" err="1"/>
+              <a:t>straks</a:t>
+            </a:r>
+            <a:r>
+              <a:rPr lang="en-US" dirty="0"/>
+              <a:t>:</a:t>
+            </a:r>
+          </a:p>
+          <a:p>
+            <a:pPr lvl="1"/>
+            <a:r>
+              <a:rPr lang="en-US" dirty="0">
+                <a:hlinkClick r:id="rId2"/>
+              </a:rPr>
+              <a:t>https://www.usebruno.com/</a:t>
+            </a:r>
+            <a:endParaRPr lang="en-US" dirty="0"/>
+          </a:p>
+          <a:p>
+            <a:pPr lvl="1"/>
+            <a:endParaRPr lang="en-US" dirty="0"/>
+          </a:p>
+          <a:p>
+            <a:pPr lvl="1"/>
+            <a:r>
+              <a:rPr lang="en-US" dirty="0">
+                <a:hlinkClick r:id="rId3"/>
+              </a:rPr>
+              <a:t>https://github.com/Geonovum/Workshop-OGC-Sensor-APIs-basis</a:t>
+            </a:r>
+            <a:endParaRPr lang="en-US" dirty="0"/>
+          </a:p>
+        </p:txBody>
+      </p:sp>
+      <p:sp>
+        <p:nvSpPr>
+          <p:cNvPr id="4" name="Slide Number Placeholder 3">
+            <a:extLst>
+              <a:ext uri="{FF2B5EF4-FFF2-40B4-BE49-F238E27FC236}">
+                <a16:creationId xmlns:a16="http://schemas.microsoft.com/office/drawing/2014/main" id="{B5295A70-814B-C322-95F1-5DF01537ADE0}"/>
+              </a:ext>
+            </a:extLst>
+          </p:cNvPr>
+          <p:cNvSpPr>
+            <a:spLocks noGrp="1"/>
+          </p:cNvSpPr>
+          <p:nvPr>
+            <p:ph type="sldNum" sz="quarter" idx="12"/>
+          </p:nvPr>
+        </p:nvSpPr>
+        <p:spPr/>
+        <p:txBody>
+          <a:bodyPr/>
+          <a:lstStyle/>
+          <a:p>
             <a:fld id="{A648B885-FF76-47CB-8BBD-27E7EBF07CA9}" type="slidenum">
-              <a:rPr kumimoji="0" lang="nl-NL" sz="1000" b="1" i="0" u="none" strike="noStrike" kern="1200" cap="none" spc="0" normalizeH="0" baseline="0" noProof="0" smtClean="0">
-                <a:ln>
-                  <a:noFill/>
-                </a:ln>
-                <a:solidFill>
-                  <a:srgbClr val="3C3C3C"/>
-                </a:solidFill>
-                <a:effectLst/>
-                <a:uLnTx/>
-                <a:uFillTx/>
-                <a:latin typeface="Tenorite"/>
-                <a:ea typeface="+mn-ea"/>
-                <a:cs typeface="+mn-cs"/>
-              </a:rPr>
-              <a:pPr marL="0" marR="0" lvl="0" indent="0" algn="r" defTabSz="914400" rtl="0" eaLnBrk="1" fontAlgn="auto" latinLnBrk="0" hangingPunct="1">
-                <a:lnSpc>
-                  <a:spcPct val="100000"/>
-                </a:lnSpc>
-                <a:spcBef>
-                  <a:spcPts val="0"/>
-                </a:spcBef>
-                <a:spcAft>
-                  <a:spcPts val="0"/>
-                </a:spcAft>
-                <a:buClrTx/>
-                <a:buSzTx/>
-                <a:buFontTx/>
-                <a:buNone/>
-                <a:tabLst/>
-                <a:defRPr/>
-              </a:pPr>
+              <a:rPr lang="nl-NL" smtClean="0"/>
               <a:t>3</a:t>
             </a:fld>
-            <a:endParaRPr kumimoji="0" lang="nl-NL" sz="1000" b="1" i="0" u="none" strike="noStrike" kern="1200" cap="none" spc="0" normalizeH="0" baseline="0" noProof="0">
-              <a:ln>
-                <a:noFill/>
-              </a:ln>
-              <a:solidFill>
-                <a:srgbClr val="3C3C3C"/>
-              </a:solidFill>
-              <a:effectLst/>
-              <a:uLnTx/>
-              <a:uFillTx/>
-              <a:latin typeface="Tenorite"/>
-              <a:ea typeface="+mn-ea"/>
-              <a:cs typeface="+mn-cs"/>
-            </a:endParaRPr>
+            <a:endParaRPr lang="nl-NL"/>
           </a:p>
         </p:txBody>
       </p:sp>
     </p:spTree>
     <p:extLst>
       <p:ext uri="{BB962C8B-B14F-4D97-AF65-F5344CB8AC3E}">
-        <p14:creationId xmlns:p14="http://schemas.microsoft.com/office/powerpoint/2010/main" val="3432893582"/>
+        <p14:creationId xmlns:p14="http://schemas.microsoft.com/office/powerpoint/2010/main" val="1211389566"/>
       </p:ext>
     </p:extLst>
   </p:cSld>
@@ -21421,10 +21575,10 @@
       </p:grpSpPr>
       <p:sp>
         <p:nvSpPr>
-          <p:cNvPr id="2" name="Titel 1">
-            <a:extLst>
-              <a:ext uri="{FF2B5EF4-FFF2-40B4-BE49-F238E27FC236}">
-                <a16:creationId xmlns:a16="http://schemas.microsoft.com/office/drawing/2014/main" id="{D1489ED3-B3BC-CD88-3CE0-7CB84C2A6A17}"/>
+          <p:cNvPr id="6" name="Titel 5">
+            <a:extLst>
+              <a:ext uri="{FF2B5EF4-FFF2-40B4-BE49-F238E27FC236}">
+                <a16:creationId xmlns:a16="http://schemas.microsoft.com/office/drawing/2014/main" id="{5C14EEB9-ACEB-88AD-E05E-2E9A8A69CBD5}"/>
               </a:ext>
             </a:extLst>
           </p:cNvPr>
@@ -21435,54 +21589,21 @@
             <p:ph type="title"/>
           </p:nvPr>
         </p:nvSpPr>
-        <p:spPr/>
-        <p:txBody>
-          <a:bodyPr/>
-          <a:lstStyle/>
-          <a:p>
-            <a:r>
-              <a:rPr lang="nl-NL" dirty="0"/>
-              <a:t>Belang Geonovum stimuleren</a:t>
-            </a:r>
-            <a:br>
-              <a:rPr lang="nl-NL" dirty="0"/>
-            </a:br>
-            <a:r>
-              <a:rPr lang="nl-NL" dirty="0"/>
-              <a:t>OGC-API-gebruik?</a:t>
-            </a:r>
-          </a:p>
-        </p:txBody>
-      </p:sp>
-      <p:sp>
-        <p:nvSpPr>
-          <p:cNvPr id="3" name="Tijdelijke aanduiding voor inhoud 2">
-            <a:extLst>
-              <a:ext uri="{FF2B5EF4-FFF2-40B4-BE49-F238E27FC236}">
-                <a16:creationId xmlns:a16="http://schemas.microsoft.com/office/drawing/2014/main" id="{8BCE330D-90E9-B597-3895-634AA28362BE}"/>
-              </a:ext>
-            </a:extLst>
-          </p:cNvPr>
-          <p:cNvSpPr>
-            <a:spLocks noGrp="1"/>
-          </p:cNvSpPr>
-          <p:nvPr>
-            <p:ph idx="1"/>
-          </p:nvPr>
-        </p:nvSpPr>
-        <p:spPr/>
+        <p:spPr>
+          <a:xfrm>
+            <a:off x="364585" y="150608"/>
+            <a:ext cx="9780132" cy="1280159"/>
+          </a:xfrm>
+        </p:spPr>
         <p:txBody>
           <a:bodyPr>
-            <a:normAutofit fontScale="92500" lnSpcReduction="10000"/>
+            <a:normAutofit/>
           </a:bodyPr>
           <a:lstStyle/>
           <a:p>
-            <a:pPr marL="0" indent="0">
-              <a:buNone/>
-            </a:pPr>
             <a:r>
               <a:rPr lang="nl-NL" dirty="0"/>
-              <a:t>OGC-</a:t>
+              <a:t>Waarom OGC </a:t>
             </a:r>
             <a:r>
               <a:rPr lang="nl-NL" dirty="0" err="1"/>
@@ -21490,139 +21611,139 @@
             </a:r>
             <a:r>
               <a:rPr lang="nl-NL" dirty="0"/>
-              <a:t> passen binnen de visie van Geonovum:</a:t>
-            </a:r>
-          </a:p>
+              <a:t> ?</a:t>
+            </a:r>
+          </a:p>
+        </p:txBody>
+      </p:sp>
+      <p:sp>
+        <p:nvSpPr>
+          <p:cNvPr id="7" name="Tijdelijke aanduiding voor inhoud 6">
+            <a:extLst>
+              <a:ext uri="{FF2B5EF4-FFF2-40B4-BE49-F238E27FC236}">
+                <a16:creationId xmlns:a16="http://schemas.microsoft.com/office/drawing/2014/main" id="{3E8A6620-23F4-508B-17BB-C3AC9048D7AD}"/>
+              </a:ext>
+            </a:extLst>
+          </p:cNvPr>
+          <p:cNvSpPr>
+            <a:spLocks noGrp="1"/>
+          </p:cNvSpPr>
+          <p:nvPr>
+            <p:ph idx="1"/>
+          </p:nvPr>
+        </p:nvSpPr>
+        <p:spPr>
+          <a:xfrm>
+            <a:off x="228600" y="1704976"/>
+            <a:ext cx="11963400" cy="4932363"/>
+          </a:xfrm>
+        </p:spPr>
+        <p:txBody>
+          <a:bodyPr>
+            <a:normAutofit/>
+          </a:bodyPr>
+          <a:lstStyle/>
           <a:p>
             <a:r>
               <a:rPr lang="nl-NL" dirty="0"/>
-              <a:t>Geonovum wil de Nederlandse </a:t>
+              <a:t>Makkelijker dan oude generatie services voor web-ontwikkelaars buiten het </a:t>
             </a:r>
             <a:r>
               <a:rPr lang="nl-NL" dirty="0" err="1"/>
-              <a:t>geo</a:t>
-            </a:r>
+              <a:t>geodomein</a:t>
+            </a:r>
+            <a:endParaRPr lang="nl-NL" dirty="0"/>
+          </a:p>
+          <a:p>
+            <a:pPr lvl="1"/>
             <a:r>
               <a:rPr lang="nl-NL" dirty="0"/>
-              <a:t>-informatie infrastructuur versterken door het voor een brede groep toegankelijker te maken.</a:t>
+              <a:t>Je hoeft geen GIS-specialist te zijn om er mee te werken;</a:t>
+            </a:r>
+          </a:p>
+          <a:p>
+            <a:pPr lvl="1"/>
+            <a:r>
+              <a:rPr lang="nl-NL" dirty="0"/>
+              <a:t>Ook goed te gebruiken binnen het </a:t>
+            </a:r>
+            <a:r>
+              <a:rPr lang="nl-NL" dirty="0" err="1"/>
+              <a:t>geodomein</a:t>
+            </a:r>
+            <a:r>
+              <a:rPr lang="nl-NL" dirty="0"/>
+              <a:t>;</a:t>
+            </a:r>
+          </a:p>
+          <a:p>
+            <a:pPr lvl="1"/>
+            <a:r>
+              <a:rPr lang="nl-NL" dirty="0" err="1"/>
+              <a:t>Openapi</a:t>
+            </a:r>
+            <a:r>
+              <a:rPr lang="nl-NL" dirty="0"/>
+              <a:t> specificatie beschrijft wat er mee kan;</a:t>
+            </a:r>
+          </a:p>
+          <a:p>
+            <a:pPr lvl="1"/>
+            <a:r>
+              <a:rPr lang="nl-NL" dirty="0"/>
+              <a:t>Werkt heel intuïtief.</a:t>
             </a:r>
           </a:p>
           <a:p>
             <a:endParaRPr lang="nl-NL" dirty="0"/>
           </a:p>
           <a:p>
+            <a:r>
+              <a:rPr lang="nl-NL" dirty="0"/>
+              <a:t>Beter te vinden door zoekmachines</a:t>
+            </a:r>
+          </a:p>
+          <a:p>
+            <a:endParaRPr lang="nl-NL" dirty="0"/>
+          </a:p>
+          <a:p>
+            <a:r>
+              <a:rPr lang="nl-NL" dirty="0"/>
+              <a:t>Verschillende types hebben dezelfde structuur en zijn daardoor ook eenvoudiger te combineren.</a:t>
+            </a:r>
+          </a:p>
+          <a:p>
+            <a:endParaRPr lang="nl-NL" dirty="0"/>
+          </a:p>
+          <a:p>
             <a:pPr marL="0" indent="0">
-              <a:buNone/>
-            </a:pPr>
-            <a:r>
-              <a:rPr lang="nl-NL" dirty="0"/>
-              <a:t>OGC-API spelen een rol in ontwikkelingen die van belang zijn voor Geonovum zoals:</a:t>
-            </a:r>
-          </a:p>
-          <a:p>
-            <a:r>
-              <a:rPr lang="nl-NL" dirty="0"/>
-              <a:t>Europese datastrategie</a:t>
-            </a:r>
-          </a:p>
-          <a:p>
-            <a:r>
-              <a:rPr lang="nl-NL" dirty="0"/>
-              <a:t>IBDS: Federatief Datastelsel</a:t>
-            </a:r>
-          </a:p>
-          <a:p>
-            <a:r>
-              <a:rPr lang="nl-NL" dirty="0"/>
-              <a:t>Common </a:t>
-            </a:r>
-            <a:r>
-              <a:rPr lang="nl-NL" dirty="0" err="1"/>
-              <a:t>Ground</a:t>
-            </a:r>
-            <a:r>
-              <a:rPr lang="nl-NL" dirty="0"/>
-              <a:t> </a:t>
-            </a:r>
-          </a:p>
-          <a:p>
-            <a:r>
-              <a:rPr lang="nl-NL" dirty="0"/>
-              <a:t>Zicht op Nederland</a:t>
-            </a:r>
-          </a:p>
-          <a:p>
-            <a:pPr lvl="1"/>
-            <a:r>
-              <a:rPr lang="nl-NL" dirty="0"/>
-              <a:t>Digital </a:t>
-            </a:r>
-            <a:r>
-              <a:rPr lang="nl-NL" dirty="0" err="1"/>
-              <a:t>Twins</a:t>
-            </a:r>
-            <a:endParaRPr lang="nl-NL" dirty="0"/>
-          </a:p>
-          <a:p>
-            <a:pPr lvl="1"/>
-            <a:r>
-              <a:rPr lang="nl-NL" dirty="0"/>
-              <a:t>Datafundament</a:t>
-            </a:r>
-          </a:p>
-          <a:p>
-            <a:endParaRPr lang="nl-NL" dirty="0"/>
-          </a:p>
-          <a:p>
-            <a:endParaRPr lang="nl-NL" dirty="0"/>
-          </a:p>
-          <a:p>
-            <a:endParaRPr lang="nl-NL" dirty="0"/>
-          </a:p>
-          <a:p>
-            <a:pPr marL="457200" lvl="1" indent="0">
               <a:buNone/>
             </a:pPr>
             <a:endParaRPr lang="nl-NL" dirty="0"/>
           </a:p>
           <a:p>
-            <a:pPr marL="457200" lvl="1" indent="0">
+            <a:endParaRPr lang="nl-NL" dirty="0"/>
+          </a:p>
+          <a:p>
+            <a:pPr marL="0" indent="0">
               <a:buNone/>
             </a:pPr>
             <a:endParaRPr lang="nl-NL" dirty="0"/>
           </a:p>
           <a:p>
-            <a:endParaRPr lang="nl-NL" dirty="0"/>
-          </a:p>
-          <a:p>
-            <a:endParaRPr lang="nl-NL" dirty="0"/>
-          </a:p>
-          <a:p>
             <a:pPr marL="0" indent="0">
               <a:buNone/>
             </a:pPr>
             <a:endParaRPr lang="nl-NL" dirty="0"/>
           </a:p>
-          <a:p>
-            <a:pPr marL="0" indent="0">
-              <a:buNone/>
-            </a:pPr>
-            <a:endParaRPr lang="nl-NL" dirty="0"/>
-          </a:p>
-          <a:p>
-            <a:endParaRPr lang="nl-NL" dirty="0"/>
-          </a:p>
-          <a:p>
-            <a:endParaRPr lang="nl-NL" dirty="0"/>
-          </a:p>
-        </p:txBody>
-      </p:sp>
-      <p:sp>
-        <p:nvSpPr>
-          <p:cNvPr id="4" name="Tijdelijke aanduiding voor dianummer 3">
-            <a:extLst>
-              <a:ext uri="{FF2B5EF4-FFF2-40B4-BE49-F238E27FC236}">
-                <a16:creationId xmlns:a16="http://schemas.microsoft.com/office/drawing/2014/main" id="{496AEBC7-0D2A-BA06-52C3-C46D769B27BC}"/>
+        </p:txBody>
+      </p:sp>
+      <p:sp>
+        <p:nvSpPr>
+          <p:cNvPr id="5" name="Tijdelijke aanduiding voor dianummer 4">
+            <a:extLst>
+              <a:ext uri="{FF2B5EF4-FFF2-40B4-BE49-F238E27FC236}">
+                <a16:creationId xmlns:a16="http://schemas.microsoft.com/office/drawing/2014/main" id="{5AC528AC-652C-B32B-D213-8BFAA63CC35A}"/>
               </a:ext>
             </a:extLst>
           </p:cNvPr>
@@ -21709,7 +21830,7 @@
     </p:spTree>
     <p:extLst>
       <p:ext uri="{BB962C8B-B14F-4D97-AF65-F5344CB8AC3E}">
-        <p14:creationId xmlns:p14="http://schemas.microsoft.com/office/powerpoint/2010/main" val="643952231"/>
+        <p14:creationId xmlns:p14="http://schemas.microsoft.com/office/powerpoint/2010/main" val="3432893582"/>
       </p:ext>
     </p:extLst>
   </p:cSld>
@@ -21738,10 +21859,10 @@
       </p:grpSpPr>
       <p:sp>
         <p:nvSpPr>
-          <p:cNvPr id="2" name="Title 1">
-            <a:extLst>
-              <a:ext uri="{FF2B5EF4-FFF2-40B4-BE49-F238E27FC236}">
-                <a16:creationId xmlns:a16="http://schemas.microsoft.com/office/drawing/2014/main" id="{E5725863-3287-6C98-044F-584FD2AB421A}"/>
+          <p:cNvPr id="2" name="Titel 1">
+            <a:extLst>
+              <a:ext uri="{FF2B5EF4-FFF2-40B4-BE49-F238E27FC236}">
+                <a16:creationId xmlns:a16="http://schemas.microsoft.com/office/drawing/2014/main" id="{D1489ED3-B3BC-CD88-3CE0-7CB84C2A6A17}"/>
               </a:ext>
             </a:extLst>
           </p:cNvPr>
@@ -21758,18 +21879,25 @@
           <a:lstStyle/>
           <a:p>
             <a:r>
-              <a:rPr lang="en-US" dirty="0"/>
-              <a:t>Testbed 2026, Phase 1, sensors</a:t>
-            </a:r>
-          </a:p>
-        </p:txBody>
-      </p:sp>
-      <p:sp>
-        <p:nvSpPr>
-          <p:cNvPr id="3" name="Content Placeholder 2">
-            <a:extLst>
-              <a:ext uri="{FF2B5EF4-FFF2-40B4-BE49-F238E27FC236}">
-                <a16:creationId xmlns:a16="http://schemas.microsoft.com/office/drawing/2014/main" id="{0737DC7E-DBAD-30D5-8EE8-6875CD1FBAD1}"/>
+              <a:rPr lang="nl-NL" dirty="0"/>
+              <a:t>Belang Geonovum stimuleren</a:t>
+            </a:r>
+            <a:br>
+              <a:rPr lang="nl-NL" dirty="0"/>
+            </a:br>
+            <a:r>
+              <a:rPr lang="nl-NL" dirty="0"/>
+              <a:t>OGC-API-gebruik?</a:t>
+            </a:r>
+          </a:p>
+        </p:txBody>
+      </p:sp>
+      <p:sp>
+        <p:nvSpPr>
+          <p:cNvPr id="3" name="Tijdelijke aanduiding voor inhoud 2">
+            <a:extLst>
+              <a:ext uri="{FF2B5EF4-FFF2-40B4-BE49-F238E27FC236}">
+                <a16:creationId xmlns:a16="http://schemas.microsoft.com/office/drawing/2014/main" id="{8BCE330D-90E9-B597-3895-634AA28362BE}"/>
               </a:ext>
             </a:extLst>
           </p:cNvPr>
@@ -21778,6 +21906,169 @@
           </p:cNvSpPr>
           <p:nvPr>
             <p:ph idx="1"/>
+          </p:nvPr>
+        </p:nvSpPr>
+        <p:spPr/>
+        <p:txBody>
+          <a:bodyPr>
+            <a:normAutofit fontScale="92500" lnSpcReduction="10000"/>
+          </a:bodyPr>
+          <a:lstStyle/>
+          <a:p>
+            <a:pPr marL="0" indent="0">
+              <a:buNone/>
+            </a:pPr>
+            <a:r>
+              <a:rPr lang="nl-NL" dirty="0"/>
+              <a:t>OGC-</a:t>
+            </a:r>
+            <a:r>
+              <a:rPr lang="nl-NL" dirty="0" err="1"/>
+              <a:t>API’s</a:t>
+            </a:r>
+            <a:r>
+              <a:rPr lang="nl-NL" dirty="0"/>
+              <a:t> passen binnen de visie van Geonovum:</a:t>
+            </a:r>
+          </a:p>
+          <a:p>
+            <a:r>
+              <a:rPr lang="nl-NL" dirty="0"/>
+              <a:t>Geonovum wil de Nederlandse </a:t>
+            </a:r>
+            <a:r>
+              <a:rPr lang="nl-NL" dirty="0" err="1"/>
+              <a:t>geo</a:t>
+            </a:r>
+            <a:r>
+              <a:rPr lang="nl-NL" dirty="0"/>
+              <a:t>-informatie infrastructuur versterken door het voor een brede groep toegankelijker te maken.</a:t>
+            </a:r>
+          </a:p>
+          <a:p>
+            <a:endParaRPr lang="nl-NL" dirty="0"/>
+          </a:p>
+          <a:p>
+            <a:pPr marL="0" indent="0">
+              <a:buNone/>
+            </a:pPr>
+            <a:r>
+              <a:rPr lang="nl-NL" dirty="0"/>
+              <a:t>OGC-API spelen een rol in ontwikkelingen die van belang zijn voor Geonovum zoals:</a:t>
+            </a:r>
+          </a:p>
+          <a:p>
+            <a:r>
+              <a:rPr lang="nl-NL" dirty="0"/>
+              <a:t>Europese datastrategie</a:t>
+            </a:r>
+          </a:p>
+          <a:p>
+            <a:r>
+              <a:rPr lang="nl-NL" dirty="0"/>
+              <a:t>IBDS: Federatief Datastelsel</a:t>
+            </a:r>
+          </a:p>
+          <a:p>
+            <a:r>
+              <a:rPr lang="nl-NL" dirty="0"/>
+              <a:t>Common </a:t>
+            </a:r>
+            <a:r>
+              <a:rPr lang="nl-NL" dirty="0" err="1"/>
+              <a:t>Ground</a:t>
+            </a:r>
+            <a:r>
+              <a:rPr lang="nl-NL" dirty="0"/>
+              <a:t> </a:t>
+            </a:r>
+          </a:p>
+          <a:p>
+            <a:r>
+              <a:rPr lang="nl-NL" dirty="0"/>
+              <a:t>Zicht op Nederland</a:t>
+            </a:r>
+          </a:p>
+          <a:p>
+            <a:pPr lvl="1"/>
+            <a:r>
+              <a:rPr lang="nl-NL" dirty="0"/>
+              <a:t>Digital </a:t>
+            </a:r>
+            <a:r>
+              <a:rPr lang="nl-NL" dirty="0" err="1"/>
+              <a:t>Twins</a:t>
+            </a:r>
+            <a:endParaRPr lang="nl-NL" dirty="0"/>
+          </a:p>
+          <a:p>
+            <a:pPr lvl="1"/>
+            <a:r>
+              <a:rPr lang="nl-NL" dirty="0"/>
+              <a:t>Datafundament</a:t>
+            </a:r>
+          </a:p>
+          <a:p>
+            <a:endParaRPr lang="nl-NL" dirty="0"/>
+          </a:p>
+          <a:p>
+            <a:endParaRPr lang="nl-NL" dirty="0"/>
+          </a:p>
+          <a:p>
+            <a:endParaRPr lang="nl-NL" dirty="0"/>
+          </a:p>
+          <a:p>
+            <a:pPr marL="457200" lvl="1" indent="0">
+              <a:buNone/>
+            </a:pPr>
+            <a:endParaRPr lang="nl-NL" dirty="0"/>
+          </a:p>
+          <a:p>
+            <a:pPr marL="457200" lvl="1" indent="0">
+              <a:buNone/>
+            </a:pPr>
+            <a:endParaRPr lang="nl-NL" dirty="0"/>
+          </a:p>
+          <a:p>
+            <a:endParaRPr lang="nl-NL" dirty="0"/>
+          </a:p>
+          <a:p>
+            <a:endParaRPr lang="nl-NL" dirty="0"/>
+          </a:p>
+          <a:p>
+            <a:pPr marL="0" indent="0">
+              <a:buNone/>
+            </a:pPr>
+            <a:endParaRPr lang="nl-NL" dirty="0"/>
+          </a:p>
+          <a:p>
+            <a:pPr marL="0" indent="0">
+              <a:buNone/>
+            </a:pPr>
+            <a:endParaRPr lang="nl-NL" dirty="0"/>
+          </a:p>
+          <a:p>
+            <a:endParaRPr lang="nl-NL" dirty="0"/>
+          </a:p>
+          <a:p>
+            <a:endParaRPr lang="nl-NL" dirty="0"/>
+          </a:p>
+        </p:txBody>
+      </p:sp>
+      <p:sp>
+        <p:nvSpPr>
+          <p:cNvPr id="4" name="Tijdelijke aanduiding voor dianummer 3">
+            <a:extLst>
+              <a:ext uri="{FF2B5EF4-FFF2-40B4-BE49-F238E27FC236}">
+                <a16:creationId xmlns:a16="http://schemas.microsoft.com/office/drawing/2014/main" id="{496AEBC7-0D2A-BA06-52C3-C46D769B27BC}"/>
+              </a:ext>
+            </a:extLst>
+          </p:cNvPr>
+          <p:cNvSpPr>
+            <a:spLocks noGrp="1"/>
+          </p:cNvSpPr>
+          <p:nvPr>
+            <p:ph type="sldNum" sz="quarter" idx="12"/>
           </p:nvPr>
         </p:nvSpPr>
         <p:spPr/>
@@ -21785,54 +22076,78 @@
           <a:bodyPr/>
           <a:lstStyle/>
           <a:p>
-            <a:r>
-              <a:rPr lang="en-US" dirty="0"/>
-              <a:t>https://</a:t>
-            </a:r>
-            <a:r>
-              <a:rPr lang="en-US" dirty="0" err="1"/>
-              <a:t>github.com</a:t>
-            </a:r>
-            <a:r>
-              <a:rPr lang="en-US" dirty="0"/>
-              <a:t>/Geonovum/testbed-sensordata-2026</a:t>
-            </a:r>
-          </a:p>
-        </p:txBody>
-      </p:sp>
-      <p:sp>
-        <p:nvSpPr>
-          <p:cNvPr id="4" name="Slide Number Placeholder 3">
-            <a:extLst>
-              <a:ext uri="{FF2B5EF4-FFF2-40B4-BE49-F238E27FC236}">
-                <a16:creationId xmlns:a16="http://schemas.microsoft.com/office/drawing/2014/main" id="{235FEBFE-F3C6-578B-E2D6-97A47EE2C862}"/>
-              </a:ext>
-            </a:extLst>
-          </p:cNvPr>
-          <p:cNvSpPr>
-            <a:spLocks noGrp="1"/>
-          </p:cNvSpPr>
-          <p:nvPr>
-            <p:ph type="sldNum" sz="quarter" idx="12"/>
-          </p:nvPr>
-        </p:nvSpPr>
-        <p:spPr/>
-        <p:txBody>
-          <a:bodyPr/>
-          <a:lstStyle/>
-          <a:p>
+            <a:pPr marL="0" marR="0" lvl="0" indent="0" algn="r" defTabSz="914400" rtl="0" eaLnBrk="1" fontAlgn="auto" latinLnBrk="0" hangingPunct="1">
+              <a:lnSpc>
+                <a:spcPct val="100000"/>
+              </a:lnSpc>
+              <a:spcBef>
+                <a:spcPts val="0"/>
+              </a:spcBef>
+              <a:spcAft>
+                <a:spcPts val="0"/>
+              </a:spcAft>
+              <a:buClrTx/>
+              <a:buSzTx/>
+              <a:buFontTx/>
+              <a:buNone/>
+              <a:tabLst/>
+              <a:defRPr/>
+            </a:pPr>
             <a:fld id="{A648B885-FF76-47CB-8BBD-27E7EBF07CA9}" type="slidenum">
-              <a:rPr lang="nl-NL" smtClean="0"/>
+              <a:rPr kumimoji="0" lang="nl-NL" sz="1000" b="1" i="0" u="none" strike="noStrike" kern="1200" cap="none" spc="0" normalizeH="0" baseline="0" noProof="0" smtClean="0">
+                <a:ln>
+                  <a:noFill/>
+                </a:ln>
+                <a:solidFill>
+                  <a:srgbClr val="3C3C3C"/>
+                </a:solidFill>
+                <a:effectLst/>
+                <a:uLnTx/>
+                <a:uFillTx/>
+                <a:latin typeface="Tenorite"/>
+                <a:ea typeface="+mn-ea"/>
+                <a:cs typeface="+mn-cs"/>
+              </a:rPr>
+              <a:pPr marL="0" marR="0" lvl="0" indent="0" algn="r" defTabSz="914400" rtl="0" eaLnBrk="1" fontAlgn="auto" latinLnBrk="0" hangingPunct="1">
+                <a:lnSpc>
+                  <a:spcPct val="100000"/>
+                </a:lnSpc>
+                <a:spcBef>
+                  <a:spcPts val="0"/>
+                </a:spcBef>
+                <a:spcAft>
+                  <a:spcPts val="0"/>
+                </a:spcAft>
+                <a:buClrTx/>
+                <a:buSzTx/>
+                <a:buFontTx/>
+                <a:buNone/>
+                <a:tabLst/>
+                <a:defRPr/>
+              </a:pPr>
               <a:t>5</a:t>
             </a:fld>
-            <a:endParaRPr lang="nl-NL"/>
+            <a:endParaRPr kumimoji="0" lang="nl-NL" sz="1000" b="1" i="0" u="none" strike="noStrike" kern="1200" cap="none" spc="0" normalizeH="0" baseline="0" noProof="0">
+              <a:ln>
+                <a:noFill/>
+              </a:ln>
+              <a:solidFill>
+                <a:srgbClr val="3C3C3C"/>
+              </a:solidFill>
+              <a:effectLst/>
+              <a:uLnTx/>
+              <a:uFillTx/>
+              <a:latin typeface="Tenorite"/>
+              <a:ea typeface="+mn-ea"/>
+              <a:cs typeface="+mn-cs"/>
+            </a:endParaRPr>
           </a:p>
         </p:txBody>
       </p:sp>
     </p:spTree>
     <p:extLst>
       <p:ext uri="{BB962C8B-B14F-4D97-AF65-F5344CB8AC3E}">
-        <p14:creationId xmlns:p14="http://schemas.microsoft.com/office/powerpoint/2010/main" val="228149220"/>
+        <p14:creationId xmlns:p14="http://schemas.microsoft.com/office/powerpoint/2010/main" val="643952231"/>
       </p:ext>
     </p:extLst>
   </p:cSld>
@@ -21864,7 +22179,7 @@
           <p:cNvPr id="2" name="Title 1">
             <a:extLst>
               <a:ext uri="{FF2B5EF4-FFF2-40B4-BE49-F238E27FC236}">
-                <a16:creationId xmlns:a16="http://schemas.microsoft.com/office/drawing/2014/main" id="{1178400F-1BF0-0DD8-ED0A-4B00B5EAB412}"/>
+                <a16:creationId xmlns:a16="http://schemas.microsoft.com/office/drawing/2014/main" id="{E5725863-3287-6C98-044F-584FD2AB421A}"/>
               </a:ext>
             </a:extLst>
           </p:cNvPr>
@@ -21882,15 +22197,43 @@
           <a:p>
             <a:r>
               <a:rPr lang="en-US" dirty="0"/>
-              <a:t>IoT </a:t>
+              <a:t>Testbed 2026, Phase 1, sensors</a:t>
+            </a:r>
+          </a:p>
+        </p:txBody>
+      </p:sp>
+      <p:sp>
+        <p:nvSpPr>
+          <p:cNvPr id="3" name="Content Placeholder 2">
+            <a:extLst>
+              <a:ext uri="{FF2B5EF4-FFF2-40B4-BE49-F238E27FC236}">
+                <a16:creationId xmlns:a16="http://schemas.microsoft.com/office/drawing/2014/main" id="{0737DC7E-DBAD-30D5-8EE8-6875CD1FBAD1}"/>
+              </a:ext>
+            </a:extLst>
+          </p:cNvPr>
+          <p:cNvSpPr>
+            <a:spLocks noGrp="1"/>
+          </p:cNvSpPr>
+          <p:nvPr>
+            <p:ph idx="1"/>
+          </p:nvPr>
+        </p:nvSpPr>
+        <p:spPr/>
+        <p:txBody>
+          <a:bodyPr/>
+          <a:lstStyle/>
+          <a:p>
+            <a:r>
+              <a:rPr lang="en-US" dirty="0"/>
+              <a:t>https://</a:t>
             </a:r>
             <a:r>
               <a:rPr lang="en-US" dirty="0" err="1"/>
-              <a:t>DataFlow</a:t>
+              <a:t>github.com</a:t>
             </a:r>
             <a:r>
               <a:rPr lang="en-US" dirty="0"/>
-              <a:t> for Sensing</a:t>
+              <a:t>/Geonovum/testbed-sensordata-2026</a:t>
             </a:r>
           </a:p>
         </p:txBody>
@@ -21900,7 +22243,7 @@
           <p:cNvPr id="4" name="Slide Number Placeholder 3">
             <a:extLst>
               <a:ext uri="{FF2B5EF4-FFF2-40B4-BE49-F238E27FC236}">
-                <a16:creationId xmlns:a16="http://schemas.microsoft.com/office/drawing/2014/main" id="{2D6B77EC-002C-7011-BE24-0A60A7018373}"/>
+                <a16:creationId xmlns:a16="http://schemas.microsoft.com/office/drawing/2014/main" id="{235FEBFE-F3C6-578B-E2D6-97A47EE2C862}"/>
               </a:ext>
             </a:extLst>
           </p:cNvPr>
@@ -21924,698 +22267,10 @@
           </a:p>
         </p:txBody>
       </p:sp>
-      <p:pic>
-        <p:nvPicPr>
-          <p:cNvPr id="5" name="Picture 4">
-            <a:extLst>
-              <a:ext uri="{FF2B5EF4-FFF2-40B4-BE49-F238E27FC236}">
-                <a16:creationId xmlns:a16="http://schemas.microsoft.com/office/drawing/2014/main" id="{6AD34C77-2E33-AB33-C6F0-5994E98B7A60}"/>
-              </a:ext>
-            </a:extLst>
-          </p:cNvPr>
-          <p:cNvPicPr>
-            <a:picLocks noChangeAspect="1"/>
-          </p:cNvPicPr>
-          <p:nvPr/>
-        </p:nvPicPr>
-        <p:blipFill>
-          <a:blip r:embed="rId2">
-            <a:clrChange>
-              <a:clrFrom>
-                <a:srgbClr val="FFFFFF"/>
-              </a:clrFrom>
-              <a:clrTo>
-                <a:srgbClr val="FFFFFF">
-                  <a:alpha val="0"/>
-                </a:srgbClr>
-              </a:clrTo>
-            </a:clrChange>
-          </a:blip>
-          <a:srcRect l="19356" t="22177" r="18656" b="22175"/>
-          <a:stretch>
-            <a:fillRect/>
-          </a:stretch>
-        </p:blipFill>
-        <p:spPr>
-          <a:xfrm>
-            <a:off x="746516" y="4380625"/>
-            <a:ext cx="1760814" cy="1580719"/>
-          </a:xfrm>
-          <a:prstGeom prst="rect">
-            <a:avLst/>
-          </a:prstGeom>
-        </p:spPr>
-      </p:pic>
-      <p:pic>
-        <p:nvPicPr>
-          <p:cNvPr id="12" name="Picture 11">
-            <a:extLst>
-              <a:ext uri="{FF2B5EF4-FFF2-40B4-BE49-F238E27FC236}">
-                <a16:creationId xmlns:a16="http://schemas.microsoft.com/office/drawing/2014/main" id="{DF4B1990-8C55-F553-42D8-C5B2D59382F8}"/>
-              </a:ext>
-            </a:extLst>
-          </p:cNvPr>
-          <p:cNvPicPr>
-            <a:picLocks noChangeAspect="1"/>
-          </p:cNvPicPr>
-          <p:nvPr/>
-        </p:nvPicPr>
-        <p:blipFill>
-          <a:blip r:embed="rId3">
-            <a:clrChange>
-              <a:clrFrom>
-                <a:srgbClr val="FEFEFE"/>
-              </a:clrFrom>
-              <a:clrTo>
-                <a:srgbClr val="FEFEFE">
-                  <a:alpha val="0"/>
-                </a:srgbClr>
-              </a:clrTo>
-            </a:clrChange>
-          </a:blip>
-          <a:srcRect l="33668" t="14023" r="40470" b="17011"/>
-          <a:stretch>
-            <a:fillRect/>
-          </a:stretch>
-        </p:blipFill>
-        <p:spPr>
-          <a:xfrm>
-            <a:off x="2837859" y="3632233"/>
-            <a:ext cx="808166" cy="2155110"/>
-          </a:xfrm>
-          <a:prstGeom prst="rect">
-            <a:avLst/>
-          </a:prstGeom>
-        </p:spPr>
-      </p:pic>
-      <p:sp>
-        <p:nvSpPr>
-          <p:cNvPr id="13" name="Rectangle 12">
-            <a:extLst>
-              <a:ext uri="{FF2B5EF4-FFF2-40B4-BE49-F238E27FC236}">
-                <a16:creationId xmlns:a16="http://schemas.microsoft.com/office/drawing/2014/main" id="{6BC3BDC3-A6BB-2B9F-1F46-AE3FCE3F3680}"/>
-              </a:ext>
-            </a:extLst>
-          </p:cNvPr>
-          <p:cNvSpPr/>
-          <p:nvPr/>
-        </p:nvSpPr>
-        <p:spPr>
-          <a:xfrm>
-            <a:off x="7570382" y="1626781"/>
-            <a:ext cx="1212112" cy="4334563"/>
-          </a:xfrm>
-          <a:prstGeom prst="rect">
-            <a:avLst/>
-          </a:prstGeom>
-          <a:ln>
-            <a:noFill/>
-          </a:ln>
-        </p:spPr>
-        <p:style>
-          <a:lnRef idx="2">
-            <a:schemeClr val="accent1">
-              <a:shade val="50000"/>
-            </a:schemeClr>
-          </a:lnRef>
-          <a:fillRef idx="1">
-            <a:schemeClr val="accent1"/>
-          </a:fillRef>
-          <a:effectRef idx="0">
-            <a:schemeClr val="accent1"/>
-          </a:effectRef>
-          <a:fontRef idx="minor">
-            <a:schemeClr val="lt1"/>
-          </a:fontRef>
-        </p:style>
-        <p:txBody>
-          <a:bodyPr rtlCol="0" anchor="ctr"/>
-          <a:lstStyle/>
-          <a:p>
-            <a:pPr algn="ctr"/>
-            <a:r>
-              <a:rPr lang="en-US" dirty="0"/>
-              <a:t>Server</a:t>
-            </a:r>
-          </a:p>
-        </p:txBody>
-      </p:sp>
-      <p:sp>
-        <p:nvSpPr>
-          <p:cNvPr id="14" name="Rectangle 13">
-            <a:extLst>
-              <a:ext uri="{FF2B5EF4-FFF2-40B4-BE49-F238E27FC236}">
-                <a16:creationId xmlns:a16="http://schemas.microsoft.com/office/drawing/2014/main" id="{DCC4C912-F7F3-B651-63F7-344533F351ED}"/>
-              </a:ext>
-            </a:extLst>
-          </p:cNvPr>
-          <p:cNvSpPr/>
-          <p:nvPr/>
-        </p:nvSpPr>
-        <p:spPr>
-          <a:xfrm>
-            <a:off x="6480786" y="1626781"/>
-            <a:ext cx="637996" cy="4334563"/>
-          </a:xfrm>
-          <a:prstGeom prst="rect">
-            <a:avLst/>
-          </a:prstGeom>
-          <a:solidFill>
-            <a:schemeClr val="accent6">
-              <a:lumMod val="40000"/>
-              <a:lumOff val="60000"/>
-            </a:schemeClr>
-          </a:solidFill>
-          <a:ln>
-            <a:solidFill>
-              <a:srgbClr val="7F7F7F"/>
-            </a:solidFill>
-          </a:ln>
-        </p:spPr>
-        <p:style>
-          <a:lnRef idx="2">
-            <a:schemeClr val="accent1">
-              <a:shade val="50000"/>
-            </a:schemeClr>
-          </a:lnRef>
-          <a:fillRef idx="1">
-            <a:schemeClr val="accent1"/>
-          </a:fillRef>
-          <a:effectRef idx="0">
-            <a:schemeClr val="accent1"/>
-          </a:effectRef>
-          <a:fontRef idx="minor">
-            <a:schemeClr val="lt1"/>
-          </a:fontRef>
-        </p:style>
-        <p:txBody>
-          <a:bodyPr rtlCol="0" anchor="ctr"/>
-          <a:lstStyle/>
-          <a:p>
-            <a:pPr algn="ctr"/>
-            <a:endParaRPr lang="en-US" dirty="0"/>
-          </a:p>
-        </p:txBody>
-      </p:sp>
-      <p:sp>
-        <p:nvSpPr>
-          <p:cNvPr id="15" name="Can 14">
-            <a:extLst>
-              <a:ext uri="{FF2B5EF4-FFF2-40B4-BE49-F238E27FC236}">
-                <a16:creationId xmlns:a16="http://schemas.microsoft.com/office/drawing/2014/main" id="{93C4E2D1-BBFE-15E4-7BD6-E1557C4F141F}"/>
-              </a:ext>
-            </a:extLst>
-          </p:cNvPr>
-          <p:cNvSpPr/>
-          <p:nvPr/>
-        </p:nvSpPr>
-        <p:spPr>
-          <a:xfrm>
-            <a:off x="7931888" y="4912242"/>
-            <a:ext cx="467833" cy="967563"/>
-          </a:xfrm>
-          <a:prstGeom prst="can">
-            <a:avLst/>
-          </a:prstGeom>
-          <a:solidFill>
-            <a:srgbClr val="7030A0"/>
-          </a:solidFill>
-          <a:ln>
-            <a:noFill/>
-          </a:ln>
-        </p:spPr>
-        <p:style>
-          <a:lnRef idx="2">
-            <a:schemeClr val="accent1">
-              <a:shade val="50000"/>
-            </a:schemeClr>
-          </a:lnRef>
-          <a:fillRef idx="1">
-            <a:schemeClr val="accent1"/>
-          </a:fillRef>
-          <a:effectRef idx="0">
-            <a:schemeClr val="accent1"/>
-          </a:effectRef>
-          <a:fontRef idx="minor">
-            <a:schemeClr val="lt1"/>
-          </a:fontRef>
-        </p:style>
-        <p:txBody>
-          <a:bodyPr rtlCol="0" anchor="ctr"/>
-          <a:lstStyle/>
-          <a:p>
-            <a:pPr algn="ctr"/>
-            <a:endParaRPr lang="en-US"/>
-          </a:p>
-        </p:txBody>
-      </p:sp>
-      <p:sp>
-        <p:nvSpPr>
-          <p:cNvPr id="16" name="Lightning Bolt 15">
-            <a:extLst>
-              <a:ext uri="{FF2B5EF4-FFF2-40B4-BE49-F238E27FC236}">
-                <a16:creationId xmlns:a16="http://schemas.microsoft.com/office/drawing/2014/main" id="{8D009A70-B4B1-AE44-D638-143422B04AF7}"/>
-              </a:ext>
-            </a:extLst>
-          </p:cNvPr>
-          <p:cNvSpPr/>
-          <p:nvPr/>
-        </p:nvSpPr>
-        <p:spPr>
-          <a:xfrm rot="19870045">
-            <a:off x="3761972" y="3231925"/>
-            <a:ext cx="2626631" cy="549405"/>
-          </a:xfrm>
-          <a:prstGeom prst="lightningBolt">
-            <a:avLst/>
-          </a:prstGeom>
-          <a:solidFill>
-            <a:srgbClr val="FFC000"/>
-          </a:solidFill>
-          <a:ln>
-            <a:noFill/>
-          </a:ln>
-        </p:spPr>
-        <p:style>
-          <a:lnRef idx="2">
-            <a:schemeClr val="accent1">
-              <a:shade val="50000"/>
-            </a:schemeClr>
-          </a:lnRef>
-          <a:fillRef idx="1">
-            <a:schemeClr val="accent1"/>
-          </a:fillRef>
-          <a:effectRef idx="0">
-            <a:schemeClr val="accent1"/>
-          </a:effectRef>
-          <a:fontRef idx="minor">
-            <a:schemeClr val="lt1"/>
-          </a:fontRef>
-        </p:style>
-        <p:txBody>
-          <a:bodyPr rtlCol="0" anchor="ctr"/>
-          <a:lstStyle/>
-          <a:p>
-            <a:pPr algn="ctr"/>
-            <a:endParaRPr lang="en-US"/>
-          </a:p>
-        </p:txBody>
-      </p:sp>
-      <p:cxnSp>
-        <p:nvCxnSpPr>
-          <p:cNvPr id="18" name="Straight Arrow Connector 17">
-            <a:extLst>
-              <a:ext uri="{FF2B5EF4-FFF2-40B4-BE49-F238E27FC236}">
-                <a16:creationId xmlns:a16="http://schemas.microsoft.com/office/drawing/2014/main" id="{8F5F32A3-8A13-8AF9-0A80-770575503658}"/>
-              </a:ext>
-            </a:extLst>
-          </p:cNvPr>
-          <p:cNvCxnSpPr>
-            <a:cxnSpLocks/>
-            <a:endCxn id="5" idx="0"/>
-          </p:cNvCxnSpPr>
-          <p:nvPr/>
-        </p:nvCxnSpPr>
-        <p:spPr>
-          <a:xfrm>
-            <a:off x="1626923" y="3579850"/>
-            <a:ext cx="0" cy="800775"/>
-          </a:xfrm>
-          <a:prstGeom prst="straightConnector1">
-            <a:avLst/>
-          </a:prstGeom>
-          <a:ln w="12700">
-            <a:tailEnd type="triangle"/>
-          </a:ln>
-        </p:spPr>
-        <p:style>
-          <a:lnRef idx="1">
-            <a:schemeClr val="accent1"/>
-          </a:lnRef>
-          <a:fillRef idx="0">
-            <a:schemeClr val="accent1"/>
-          </a:fillRef>
-          <a:effectRef idx="0">
-            <a:schemeClr val="accent1"/>
-          </a:effectRef>
-          <a:fontRef idx="minor">
-            <a:schemeClr val="tx1"/>
-          </a:fontRef>
-        </p:style>
-      </p:cxnSp>
-      <p:cxnSp>
-        <p:nvCxnSpPr>
-          <p:cNvPr id="19" name="Straight Arrow Connector 18">
-            <a:extLst>
-              <a:ext uri="{FF2B5EF4-FFF2-40B4-BE49-F238E27FC236}">
-                <a16:creationId xmlns:a16="http://schemas.microsoft.com/office/drawing/2014/main" id="{828C4EB0-2D47-B9C0-24F6-9854C1FA2F35}"/>
-              </a:ext>
-            </a:extLst>
-          </p:cNvPr>
-          <p:cNvCxnSpPr>
-            <a:cxnSpLocks/>
-          </p:cNvCxnSpPr>
-          <p:nvPr/>
-        </p:nvCxnSpPr>
-        <p:spPr>
-          <a:xfrm flipV="1">
-            <a:off x="2118332" y="4380625"/>
-            <a:ext cx="911241" cy="329163"/>
-          </a:xfrm>
-          <a:prstGeom prst="straightConnector1">
-            <a:avLst/>
-          </a:prstGeom>
-          <a:ln w="12700">
-            <a:tailEnd type="triangle"/>
-          </a:ln>
-        </p:spPr>
-        <p:style>
-          <a:lnRef idx="1">
-            <a:schemeClr val="accent1"/>
-          </a:lnRef>
-          <a:fillRef idx="0">
-            <a:schemeClr val="accent1"/>
-          </a:fillRef>
-          <a:effectRef idx="0">
-            <a:schemeClr val="accent1"/>
-          </a:effectRef>
-          <a:fontRef idx="minor">
-            <a:schemeClr val="tx1"/>
-          </a:fontRef>
-        </p:style>
-      </p:cxnSp>
-      <p:cxnSp>
-        <p:nvCxnSpPr>
-          <p:cNvPr id="23" name="Straight Arrow Connector 22">
-            <a:extLst>
-              <a:ext uri="{FF2B5EF4-FFF2-40B4-BE49-F238E27FC236}">
-                <a16:creationId xmlns:a16="http://schemas.microsoft.com/office/drawing/2014/main" id="{2E364DBC-5693-D4DE-557C-C7345B5ED951}"/>
-              </a:ext>
-            </a:extLst>
-          </p:cNvPr>
-          <p:cNvCxnSpPr>
-            <a:cxnSpLocks/>
-          </p:cNvCxnSpPr>
-          <p:nvPr/>
-        </p:nvCxnSpPr>
-        <p:spPr>
-          <a:xfrm>
-            <a:off x="6799784" y="3104930"/>
-            <a:ext cx="1366020" cy="0"/>
-          </a:xfrm>
-          <a:prstGeom prst="straightConnector1">
-            <a:avLst/>
-          </a:prstGeom>
-          <a:ln w="12700">
-            <a:solidFill>
-              <a:schemeClr val="tx1">
-                <a:lumMod val="50000"/>
-              </a:schemeClr>
-            </a:solidFill>
-            <a:tailEnd type="triangle"/>
-          </a:ln>
-        </p:spPr>
-        <p:style>
-          <a:lnRef idx="1">
-            <a:schemeClr val="accent1"/>
-          </a:lnRef>
-          <a:fillRef idx="0">
-            <a:schemeClr val="accent1"/>
-          </a:fillRef>
-          <a:effectRef idx="0">
-            <a:schemeClr val="accent1"/>
-          </a:effectRef>
-          <a:fontRef idx="minor">
-            <a:schemeClr val="tx1"/>
-          </a:fontRef>
-        </p:style>
-      </p:cxnSp>
-      <p:pic>
-        <p:nvPicPr>
-          <p:cNvPr id="7" name="Graphic 6" descr="Badge 1 with solid fill">
-            <a:extLst>
-              <a:ext uri="{FF2B5EF4-FFF2-40B4-BE49-F238E27FC236}">
-                <a16:creationId xmlns:a16="http://schemas.microsoft.com/office/drawing/2014/main" id="{0FBAE387-4E84-7F0D-2E7A-4A8A2F2ABC29}"/>
-              </a:ext>
-            </a:extLst>
-          </p:cNvPr>
-          <p:cNvPicPr>
-            <a:picLocks noChangeAspect="1"/>
-          </p:cNvPicPr>
-          <p:nvPr/>
-        </p:nvPicPr>
-        <p:blipFill>
-          <a:blip>
-            <a:extLst>
-              <a:ext uri="{96DAC541-7B7A-43D3-8B79-37D633B846F1}">
-                <asvg:svgBlip xmlns:asvg="http://schemas.microsoft.com/office/drawing/2016/SVG/main" r:embed="rId4"/>
-              </a:ext>
-            </a:extLst>
-          </a:blip>
-          <a:stretch>
-            <a:fillRect/>
-          </a:stretch>
-        </p:blipFill>
-        <p:spPr>
-          <a:xfrm>
-            <a:off x="1329654" y="3744605"/>
-            <a:ext cx="471263" cy="471263"/>
-          </a:xfrm>
-          <a:prstGeom prst="rect">
-            <a:avLst/>
-          </a:prstGeom>
-        </p:spPr>
-      </p:pic>
-      <p:pic>
-        <p:nvPicPr>
-          <p:cNvPr id="9" name="Graphic 8" descr="Badge with solid fill">
-            <a:extLst>
-              <a:ext uri="{FF2B5EF4-FFF2-40B4-BE49-F238E27FC236}">
-                <a16:creationId xmlns:a16="http://schemas.microsoft.com/office/drawing/2014/main" id="{6DC42205-2BF7-6471-2071-17B7A13A28FC}"/>
-              </a:ext>
-            </a:extLst>
-          </p:cNvPr>
-          <p:cNvPicPr>
-            <a:picLocks noChangeAspect="1"/>
-          </p:cNvPicPr>
-          <p:nvPr/>
-        </p:nvPicPr>
-        <p:blipFill>
-          <a:blip>
-            <a:extLst>
-              <a:ext uri="{96DAC541-7B7A-43D3-8B79-37D633B846F1}">
-                <asvg:svgBlip xmlns:asvg="http://schemas.microsoft.com/office/drawing/2016/SVG/main" r:embed="rId5"/>
-              </a:ext>
-            </a:extLst>
-          </a:blip>
-          <a:stretch>
-            <a:fillRect/>
-          </a:stretch>
-        </p:blipFill>
-        <p:spPr>
-          <a:xfrm>
-            <a:off x="2311601" y="4319258"/>
-            <a:ext cx="512103" cy="512103"/>
-          </a:xfrm>
-          <a:prstGeom prst="rect">
-            <a:avLst/>
-          </a:prstGeom>
-        </p:spPr>
-      </p:pic>
-      <p:pic>
-        <p:nvPicPr>
-          <p:cNvPr id="11" name="Graphic 10" descr="Badge 3 with solid fill">
-            <a:extLst>
-              <a:ext uri="{FF2B5EF4-FFF2-40B4-BE49-F238E27FC236}">
-                <a16:creationId xmlns:a16="http://schemas.microsoft.com/office/drawing/2014/main" id="{83C8C8FF-0FDE-0A72-B213-6FA79E561DDD}"/>
-              </a:ext>
-            </a:extLst>
-          </p:cNvPr>
-          <p:cNvPicPr>
-            <a:picLocks noChangeAspect="1"/>
-          </p:cNvPicPr>
-          <p:nvPr/>
-        </p:nvPicPr>
-        <p:blipFill>
-          <a:blip>
-            <a:extLst>
-              <a:ext uri="{96DAC541-7B7A-43D3-8B79-37D633B846F1}">
-                <asvg:svgBlip xmlns:asvg="http://schemas.microsoft.com/office/drawing/2016/SVG/main" r:embed="rId6"/>
-              </a:ext>
-            </a:extLst>
-          </a:blip>
-          <a:stretch>
-            <a:fillRect/>
-          </a:stretch>
-        </p:blipFill>
-        <p:spPr>
-          <a:xfrm>
-            <a:off x="4523800" y="3460909"/>
-            <a:ext cx="666305" cy="666305"/>
-          </a:xfrm>
-          <a:prstGeom prst="rect">
-            <a:avLst/>
-          </a:prstGeom>
-        </p:spPr>
-      </p:pic>
-      <p:pic>
-        <p:nvPicPr>
-          <p:cNvPr id="20" name="Graphic 19" descr="Badge 4 with solid fill">
-            <a:extLst>
-              <a:ext uri="{FF2B5EF4-FFF2-40B4-BE49-F238E27FC236}">
-                <a16:creationId xmlns:a16="http://schemas.microsoft.com/office/drawing/2014/main" id="{6AE822AD-F4EB-0824-5B29-74BDE302CBDD}"/>
-              </a:ext>
-            </a:extLst>
-          </p:cNvPr>
-          <p:cNvPicPr>
-            <a:picLocks noChangeAspect="1"/>
-          </p:cNvPicPr>
-          <p:nvPr/>
-        </p:nvPicPr>
-        <p:blipFill>
-          <a:blip>
-            <a:extLst>
-              <a:ext uri="{96DAC541-7B7A-43D3-8B79-37D633B846F1}">
-                <asvg:svgBlip xmlns:asvg="http://schemas.microsoft.com/office/drawing/2016/SVG/main" r:embed="rId7"/>
-              </a:ext>
-            </a:extLst>
-          </a:blip>
-          <a:stretch>
-            <a:fillRect/>
-          </a:stretch>
-        </p:blipFill>
-        <p:spPr>
-          <a:xfrm>
-            <a:off x="6452477" y="2242158"/>
-            <a:ext cx="666305" cy="666305"/>
-          </a:xfrm>
-          <a:prstGeom prst="rect">
-            <a:avLst/>
-          </a:prstGeom>
-        </p:spPr>
-      </p:pic>
-      <p:pic>
-        <p:nvPicPr>
-          <p:cNvPr id="22" name="Graphic 21" descr="Badge 5 with solid fill">
-            <a:extLst>
-              <a:ext uri="{FF2B5EF4-FFF2-40B4-BE49-F238E27FC236}">
-                <a16:creationId xmlns:a16="http://schemas.microsoft.com/office/drawing/2014/main" id="{73FD95FE-E408-F702-2518-A6537339AE3F}"/>
-              </a:ext>
-            </a:extLst>
-          </p:cNvPr>
-          <p:cNvPicPr>
-            <a:picLocks noChangeAspect="1"/>
-          </p:cNvPicPr>
-          <p:nvPr/>
-        </p:nvPicPr>
-        <p:blipFill>
-          <a:blip>
-            <a:extLst>
-              <a:ext uri="{96DAC541-7B7A-43D3-8B79-37D633B846F1}">
-                <asvg:svgBlip xmlns:asvg="http://schemas.microsoft.com/office/drawing/2016/SVG/main" r:embed="rId8"/>
-              </a:ext>
-            </a:extLst>
-          </a:blip>
-          <a:stretch>
-            <a:fillRect/>
-          </a:stretch>
-        </p:blipFill>
-        <p:spPr>
-          <a:xfrm>
-            <a:off x="7835587" y="2245095"/>
-            <a:ext cx="660433" cy="660433"/>
-          </a:xfrm>
-          <a:prstGeom prst="rect">
-            <a:avLst/>
-          </a:prstGeom>
-        </p:spPr>
-      </p:pic>
-      <p:pic>
-        <p:nvPicPr>
-          <p:cNvPr id="25" name="Graphic 24" descr="Badge 6 with solid fill">
-            <a:extLst>
-              <a:ext uri="{FF2B5EF4-FFF2-40B4-BE49-F238E27FC236}">
-                <a16:creationId xmlns:a16="http://schemas.microsoft.com/office/drawing/2014/main" id="{C1A7BF82-A7EA-A1B4-88E8-2E47E4DAAA86}"/>
-              </a:ext>
-            </a:extLst>
-          </p:cNvPr>
-          <p:cNvPicPr>
-            <a:picLocks noChangeAspect="1"/>
-          </p:cNvPicPr>
-          <p:nvPr/>
-        </p:nvPicPr>
-        <p:blipFill>
-          <a:blip>
-            <a:extLst>
-              <a:ext uri="{96DAC541-7B7A-43D3-8B79-37D633B846F1}">
-                <asvg:svgBlip xmlns:asvg="http://schemas.microsoft.com/office/drawing/2016/SVG/main" r:embed="rId9"/>
-              </a:ext>
-            </a:extLst>
-          </a:blip>
-          <a:stretch>
-            <a:fillRect/>
-          </a:stretch>
-        </p:blipFill>
-        <p:spPr>
-          <a:xfrm>
-            <a:off x="9819436" y="2230704"/>
-            <a:ext cx="689215" cy="689215"/>
-          </a:xfrm>
-          <a:prstGeom prst="rect">
-            <a:avLst/>
-          </a:prstGeom>
-        </p:spPr>
-      </p:pic>
-      <p:pic>
-        <p:nvPicPr>
-          <p:cNvPr id="8" name="Picture 7">
-            <a:extLst>
-              <a:ext uri="{FF2B5EF4-FFF2-40B4-BE49-F238E27FC236}">
-                <a16:creationId xmlns:a16="http://schemas.microsoft.com/office/drawing/2014/main" id="{491BA644-CE38-DEE0-3E5C-9BE9BC1C25D2}"/>
-              </a:ext>
-            </a:extLst>
-          </p:cNvPr>
-          <p:cNvPicPr>
-            <a:picLocks noChangeAspect="1"/>
-          </p:cNvPicPr>
-          <p:nvPr/>
-        </p:nvPicPr>
-        <p:blipFill>
-          <a:blip r:embed="rId10">
-            <a:clrChange>
-              <a:clrFrom>
-                <a:srgbClr val="FEFEFE"/>
-              </a:clrFrom>
-              <a:clrTo>
-                <a:srgbClr val="FEFEFE">
-                  <a:alpha val="0"/>
-                </a:srgbClr>
-              </a:clrTo>
-            </a:clrChange>
-            <a:extLst>
-              <a:ext uri="{28A0092B-C50C-407E-A947-70E740481C1C}">
-                <a14:useLocalDpi xmlns:a14="http://schemas.microsoft.com/office/drawing/2010/main" val="0"/>
-              </a:ext>
-            </a:extLst>
-          </a:blip>
-          <a:stretch>
-            <a:fillRect/>
-          </a:stretch>
-        </p:blipFill>
-        <p:spPr>
-          <a:xfrm>
-            <a:off x="689609" y="2237041"/>
-            <a:ext cx="1464204" cy="1545927"/>
-          </a:xfrm>
-          <a:prstGeom prst="rect">
-            <a:avLst/>
-          </a:prstGeom>
-        </p:spPr>
-      </p:pic>
     </p:spTree>
     <p:extLst>
       <p:ext uri="{BB962C8B-B14F-4D97-AF65-F5344CB8AC3E}">
-        <p14:creationId xmlns:p14="http://schemas.microsoft.com/office/powerpoint/2010/main" val="4147820856"/>
+        <p14:creationId xmlns:p14="http://schemas.microsoft.com/office/powerpoint/2010/main" val="228149220"/>
       </p:ext>
     </p:extLst>
   </p:cSld>
@@ -22647,7 +22302,7 @@
           <p:cNvPr id="2" name="Title 1">
             <a:extLst>
               <a:ext uri="{FF2B5EF4-FFF2-40B4-BE49-F238E27FC236}">
-                <a16:creationId xmlns:a16="http://schemas.microsoft.com/office/drawing/2014/main" id="{521ED363-89EF-6C7E-F8F6-95F0B7DD33AF}"/>
+                <a16:creationId xmlns:a16="http://schemas.microsoft.com/office/drawing/2014/main" id="{1178400F-1BF0-0DD8-ED0A-4B00B5EAB412}"/>
               </a:ext>
             </a:extLst>
           </p:cNvPr>
@@ -22664,37 +22319,494 @@
           <a:lstStyle/>
           <a:p>
             <a:r>
+              <a:rPr lang="en-US" dirty="0"/>
+              <a:t>IoT </a:t>
+            </a:r>
+            <a:r>
               <a:rPr lang="en-US" dirty="0" err="1"/>
-              <a:t>Voorbeeld</a:t>
+              <a:t>DataFlow</a:t>
             </a:r>
             <a:r>
               <a:rPr lang="en-US" dirty="0"/>
-              <a:t> setup</a:t>
-            </a:r>
+              <a:t> for Sensing</a:t>
+            </a:r>
+          </a:p>
+        </p:txBody>
+      </p:sp>
+      <p:sp>
+        <p:nvSpPr>
+          <p:cNvPr id="4" name="Slide Number Placeholder 3">
+            <a:extLst>
+              <a:ext uri="{FF2B5EF4-FFF2-40B4-BE49-F238E27FC236}">
+                <a16:creationId xmlns:a16="http://schemas.microsoft.com/office/drawing/2014/main" id="{2D6B77EC-002C-7011-BE24-0A60A7018373}"/>
+              </a:ext>
+            </a:extLst>
+          </p:cNvPr>
+          <p:cNvSpPr>
+            <a:spLocks noGrp="1"/>
+          </p:cNvSpPr>
+          <p:nvPr>
+            <p:ph type="sldNum" sz="quarter" idx="12"/>
+          </p:nvPr>
+        </p:nvSpPr>
+        <p:spPr/>
+        <p:txBody>
+          <a:bodyPr/>
+          <a:lstStyle/>
+          <a:p>
+            <a:fld id="{A648B885-FF76-47CB-8BBD-27E7EBF07CA9}" type="slidenum">
+              <a:rPr lang="nl-NL" smtClean="0"/>
+              <a:t>7</a:t>
+            </a:fld>
+            <a:endParaRPr lang="nl-NL"/>
           </a:p>
         </p:txBody>
       </p:sp>
       <p:pic>
         <p:nvPicPr>
-          <p:cNvPr id="6" name="Content Placeholder 5">
-            <a:extLst>
-              <a:ext uri="{FF2B5EF4-FFF2-40B4-BE49-F238E27FC236}">
-                <a16:creationId xmlns:a16="http://schemas.microsoft.com/office/drawing/2014/main" id="{5F2ABBB8-47D7-2001-6400-A835E2305031}"/>
+          <p:cNvPr id="5" name="Picture 4">
+            <a:extLst>
+              <a:ext uri="{FF2B5EF4-FFF2-40B4-BE49-F238E27FC236}">
+                <a16:creationId xmlns:a16="http://schemas.microsoft.com/office/drawing/2014/main" id="{6AD34C77-2E33-AB33-C6F0-5994E98B7A60}"/>
               </a:ext>
             </a:extLst>
           </p:cNvPr>
           <p:cNvPicPr>
-            <a:picLocks noGrp="1" noChangeAspect="1"/>
+            <a:picLocks noChangeAspect="1"/>
           </p:cNvPicPr>
-          <p:nvPr>
-            <p:ph sz="half" idx="1"/>
-          </p:nvPr>
+          <p:nvPr/>
         </p:nvPicPr>
         <p:blipFill>
           <a:blip r:embed="rId2">
-            <a:extLst>
-              <a:ext uri="{28A0092B-C50C-407E-A947-70E740481C1C}">
-                <a14:useLocalDpi xmlns:a14="http://schemas.microsoft.com/office/drawing/2010/main" val="0"/>
+            <a:clrChange>
+              <a:clrFrom>
+                <a:srgbClr val="FFFFFF"/>
+              </a:clrFrom>
+              <a:clrTo>
+                <a:srgbClr val="FFFFFF">
+                  <a:alpha val="0"/>
+                </a:srgbClr>
+              </a:clrTo>
+            </a:clrChange>
+          </a:blip>
+          <a:srcRect l="19356" t="22177" r="18656" b="22175"/>
+          <a:stretch>
+            <a:fillRect/>
+          </a:stretch>
+        </p:blipFill>
+        <p:spPr>
+          <a:xfrm>
+            <a:off x="746516" y="4380625"/>
+            <a:ext cx="1760814" cy="1580719"/>
+          </a:xfrm>
+          <a:prstGeom prst="rect">
+            <a:avLst/>
+          </a:prstGeom>
+        </p:spPr>
+      </p:pic>
+      <p:pic>
+        <p:nvPicPr>
+          <p:cNvPr id="12" name="Picture 11">
+            <a:extLst>
+              <a:ext uri="{FF2B5EF4-FFF2-40B4-BE49-F238E27FC236}">
+                <a16:creationId xmlns:a16="http://schemas.microsoft.com/office/drawing/2014/main" id="{DF4B1990-8C55-F553-42D8-C5B2D59382F8}"/>
+              </a:ext>
+            </a:extLst>
+          </p:cNvPr>
+          <p:cNvPicPr>
+            <a:picLocks noChangeAspect="1"/>
+          </p:cNvPicPr>
+          <p:nvPr/>
+        </p:nvPicPr>
+        <p:blipFill>
+          <a:blip r:embed="rId3">
+            <a:clrChange>
+              <a:clrFrom>
+                <a:srgbClr val="FEFEFE"/>
+              </a:clrFrom>
+              <a:clrTo>
+                <a:srgbClr val="FEFEFE">
+                  <a:alpha val="0"/>
+                </a:srgbClr>
+              </a:clrTo>
+            </a:clrChange>
+          </a:blip>
+          <a:srcRect l="33668" t="14023" r="40470" b="17011"/>
+          <a:stretch>
+            <a:fillRect/>
+          </a:stretch>
+        </p:blipFill>
+        <p:spPr>
+          <a:xfrm>
+            <a:off x="2837859" y="3632233"/>
+            <a:ext cx="808166" cy="2155110"/>
+          </a:xfrm>
+          <a:prstGeom prst="rect">
+            <a:avLst/>
+          </a:prstGeom>
+        </p:spPr>
+      </p:pic>
+      <p:sp>
+        <p:nvSpPr>
+          <p:cNvPr id="13" name="Rectangle 12">
+            <a:extLst>
+              <a:ext uri="{FF2B5EF4-FFF2-40B4-BE49-F238E27FC236}">
+                <a16:creationId xmlns:a16="http://schemas.microsoft.com/office/drawing/2014/main" id="{6BC3BDC3-A6BB-2B9F-1F46-AE3FCE3F3680}"/>
+              </a:ext>
+            </a:extLst>
+          </p:cNvPr>
+          <p:cNvSpPr/>
+          <p:nvPr/>
+        </p:nvSpPr>
+        <p:spPr>
+          <a:xfrm>
+            <a:off x="7570382" y="1626781"/>
+            <a:ext cx="1212112" cy="4334563"/>
+          </a:xfrm>
+          <a:prstGeom prst="rect">
+            <a:avLst/>
+          </a:prstGeom>
+          <a:ln>
+            <a:noFill/>
+          </a:ln>
+        </p:spPr>
+        <p:style>
+          <a:lnRef idx="2">
+            <a:schemeClr val="accent1">
+              <a:shade val="50000"/>
+            </a:schemeClr>
+          </a:lnRef>
+          <a:fillRef idx="1">
+            <a:schemeClr val="accent1"/>
+          </a:fillRef>
+          <a:effectRef idx="0">
+            <a:schemeClr val="accent1"/>
+          </a:effectRef>
+          <a:fontRef idx="minor">
+            <a:schemeClr val="lt1"/>
+          </a:fontRef>
+        </p:style>
+        <p:txBody>
+          <a:bodyPr rtlCol="0" anchor="ctr"/>
+          <a:lstStyle/>
+          <a:p>
+            <a:pPr algn="ctr"/>
+            <a:r>
+              <a:rPr lang="en-US" dirty="0"/>
+              <a:t>Server</a:t>
+            </a:r>
+          </a:p>
+        </p:txBody>
+      </p:sp>
+      <p:sp>
+        <p:nvSpPr>
+          <p:cNvPr id="14" name="Rectangle 13">
+            <a:extLst>
+              <a:ext uri="{FF2B5EF4-FFF2-40B4-BE49-F238E27FC236}">
+                <a16:creationId xmlns:a16="http://schemas.microsoft.com/office/drawing/2014/main" id="{DCC4C912-F7F3-B651-63F7-344533F351ED}"/>
+              </a:ext>
+            </a:extLst>
+          </p:cNvPr>
+          <p:cNvSpPr/>
+          <p:nvPr/>
+        </p:nvSpPr>
+        <p:spPr>
+          <a:xfrm>
+            <a:off x="6480786" y="1626781"/>
+            <a:ext cx="637996" cy="4334563"/>
+          </a:xfrm>
+          <a:prstGeom prst="rect">
+            <a:avLst/>
+          </a:prstGeom>
+          <a:solidFill>
+            <a:schemeClr val="accent6">
+              <a:lumMod val="40000"/>
+              <a:lumOff val="60000"/>
+            </a:schemeClr>
+          </a:solidFill>
+          <a:ln>
+            <a:solidFill>
+              <a:srgbClr val="7F7F7F"/>
+            </a:solidFill>
+          </a:ln>
+        </p:spPr>
+        <p:style>
+          <a:lnRef idx="2">
+            <a:schemeClr val="accent1">
+              <a:shade val="50000"/>
+            </a:schemeClr>
+          </a:lnRef>
+          <a:fillRef idx="1">
+            <a:schemeClr val="accent1"/>
+          </a:fillRef>
+          <a:effectRef idx="0">
+            <a:schemeClr val="accent1"/>
+          </a:effectRef>
+          <a:fontRef idx="minor">
+            <a:schemeClr val="lt1"/>
+          </a:fontRef>
+        </p:style>
+        <p:txBody>
+          <a:bodyPr rtlCol="0" anchor="ctr"/>
+          <a:lstStyle/>
+          <a:p>
+            <a:pPr algn="ctr"/>
+            <a:endParaRPr lang="en-US" dirty="0"/>
+          </a:p>
+        </p:txBody>
+      </p:sp>
+      <p:sp>
+        <p:nvSpPr>
+          <p:cNvPr id="15" name="Can 14">
+            <a:extLst>
+              <a:ext uri="{FF2B5EF4-FFF2-40B4-BE49-F238E27FC236}">
+                <a16:creationId xmlns:a16="http://schemas.microsoft.com/office/drawing/2014/main" id="{93C4E2D1-BBFE-15E4-7BD6-E1557C4F141F}"/>
+              </a:ext>
+            </a:extLst>
+          </p:cNvPr>
+          <p:cNvSpPr/>
+          <p:nvPr/>
+        </p:nvSpPr>
+        <p:spPr>
+          <a:xfrm>
+            <a:off x="7931888" y="4912242"/>
+            <a:ext cx="467833" cy="967563"/>
+          </a:xfrm>
+          <a:prstGeom prst="can">
+            <a:avLst/>
+          </a:prstGeom>
+          <a:solidFill>
+            <a:srgbClr val="7030A0"/>
+          </a:solidFill>
+          <a:ln>
+            <a:noFill/>
+          </a:ln>
+        </p:spPr>
+        <p:style>
+          <a:lnRef idx="2">
+            <a:schemeClr val="accent1">
+              <a:shade val="50000"/>
+            </a:schemeClr>
+          </a:lnRef>
+          <a:fillRef idx="1">
+            <a:schemeClr val="accent1"/>
+          </a:fillRef>
+          <a:effectRef idx="0">
+            <a:schemeClr val="accent1"/>
+          </a:effectRef>
+          <a:fontRef idx="minor">
+            <a:schemeClr val="lt1"/>
+          </a:fontRef>
+        </p:style>
+        <p:txBody>
+          <a:bodyPr rtlCol="0" anchor="ctr"/>
+          <a:lstStyle/>
+          <a:p>
+            <a:pPr algn="ctr"/>
+            <a:endParaRPr lang="en-US"/>
+          </a:p>
+        </p:txBody>
+      </p:sp>
+      <p:sp>
+        <p:nvSpPr>
+          <p:cNvPr id="16" name="Lightning Bolt 15">
+            <a:extLst>
+              <a:ext uri="{FF2B5EF4-FFF2-40B4-BE49-F238E27FC236}">
+                <a16:creationId xmlns:a16="http://schemas.microsoft.com/office/drawing/2014/main" id="{8D009A70-B4B1-AE44-D638-143422B04AF7}"/>
+              </a:ext>
+            </a:extLst>
+          </p:cNvPr>
+          <p:cNvSpPr/>
+          <p:nvPr/>
+        </p:nvSpPr>
+        <p:spPr>
+          <a:xfrm rot="19870045">
+            <a:off x="3761972" y="3231925"/>
+            <a:ext cx="2626631" cy="549405"/>
+          </a:xfrm>
+          <a:prstGeom prst="lightningBolt">
+            <a:avLst/>
+          </a:prstGeom>
+          <a:solidFill>
+            <a:srgbClr val="FFC000"/>
+          </a:solidFill>
+          <a:ln>
+            <a:noFill/>
+          </a:ln>
+        </p:spPr>
+        <p:style>
+          <a:lnRef idx="2">
+            <a:schemeClr val="accent1">
+              <a:shade val="50000"/>
+            </a:schemeClr>
+          </a:lnRef>
+          <a:fillRef idx="1">
+            <a:schemeClr val="accent1"/>
+          </a:fillRef>
+          <a:effectRef idx="0">
+            <a:schemeClr val="accent1"/>
+          </a:effectRef>
+          <a:fontRef idx="minor">
+            <a:schemeClr val="lt1"/>
+          </a:fontRef>
+        </p:style>
+        <p:txBody>
+          <a:bodyPr rtlCol="0" anchor="ctr"/>
+          <a:lstStyle/>
+          <a:p>
+            <a:pPr algn="ctr"/>
+            <a:endParaRPr lang="en-US"/>
+          </a:p>
+        </p:txBody>
+      </p:sp>
+      <p:cxnSp>
+        <p:nvCxnSpPr>
+          <p:cNvPr id="18" name="Straight Arrow Connector 17">
+            <a:extLst>
+              <a:ext uri="{FF2B5EF4-FFF2-40B4-BE49-F238E27FC236}">
+                <a16:creationId xmlns:a16="http://schemas.microsoft.com/office/drawing/2014/main" id="{8F5F32A3-8A13-8AF9-0A80-770575503658}"/>
+              </a:ext>
+            </a:extLst>
+          </p:cNvPr>
+          <p:cNvCxnSpPr>
+            <a:cxnSpLocks/>
+            <a:endCxn id="5" idx="0"/>
+          </p:cNvCxnSpPr>
+          <p:nvPr/>
+        </p:nvCxnSpPr>
+        <p:spPr>
+          <a:xfrm>
+            <a:off x="1626923" y="3579850"/>
+            <a:ext cx="0" cy="800775"/>
+          </a:xfrm>
+          <a:prstGeom prst="straightConnector1">
+            <a:avLst/>
+          </a:prstGeom>
+          <a:ln w="12700">
+            <a:tailEnd type="triangle"/>
+          </a:ln>
+        </p:spPr>
+        <p:style>
+          <a:lnRef idx="1">
+            <a:schemeClr val="accent1"/>
+          </a:lnRef>
+          <a:fillRef idx="0">
+            <a:schemeClr val="accent1"/>
+          </a:fillRef>
+          <a:effectRef idx="0">
+            <a:schemeClr val="accent1"/>
+          </a:effectRef>
+          <a:fontRef idx="minor">
+            <a:schemeClr val="tx1"/>
+          </a:fontRef>
+        </p:style>
+      </p:cxnSp>
+      <p:cxnSp>
+        <p:nvCxnSpPr>
+          <p:cNvPr id="19" name="Straight Arrow Connector 18">
+            <a:extLst>
+              <a:ext uri="{FF2B5EF4-FFF2-40B4-BE49-F238E27FC236}">
+                <a16:creationId xmlns:a16="http://schemas.microsoft.com/office/drawing/2014/main" id="{828C4EB0-2D47-B9C0-24F6-9854C1FA2F35}"/>
+              </a:ext>
+            </a:extLst>
+          </p:cNvPr>
+          <p:cNvCxnSpPr>
+            <a:cxnSpLocks/>
+          </p:cNvCxnSpPr>
+          <p:nvPr/>
+        </p:nvCxnSpPr>
+        <p:spPr>
+          <a:xfrm flipV="1">
+            <a:off x="2118332" y="4380625"/>
+            <a:ext cx="911241" cy="329163"/>
+          </a:xfrm>
+          <a:prstGeom prst="straightConnector1">
+            <a:avLst/>
+          </a:prstGeom>
+          <a:ln w="12700">
+            <a:tailEnd type="triangle"/>
+          </a:ln>
+        </p:spPr>
+        <p:style>
+          <a:lnRef idx="1">
+            <a:schemeClr val="accent1"/>
+          </a:lnRef>
+          <a:fillRef idx="0">
+            <a:schemeClr val="accent1"/>
+          </a:fillRef>
+          <a:effectRef idx="0">
+            <a:schemeClr val="accent1"/>
+          </a:effectRef>
+          <a:fontRef idx="minor">
+            <a:schemeClr val="tx1"/>
+          </a:fontRef>
+        </p:style>
+      </p:cxnSp>
+      <p:cxnSp>
+        <p:nvCxnSpPr>
+          <p:cNvPr id="23" name="Straight Arrow Connector 22">
+            <a:extLst>
+              <a:ext uri="{FF2B5EF4-FFF2-40B4-BE49-F238E27FC236}">
+                <a16:creationId xmlns:a16="http://schemas.microsoft.com/office/drawing/2014/main" id="{2E364DBC-5693-D4DE-557C-C7345B5ED951}"/>
+              </a:ext>
+            </a:extLst>
+          </p:cNvPr>
+          <p:cNvCxnSpPr>
+            <a:cxnSpLocks/>
+          </p:cNvCxnSpPr>
+          <p:nvPr/>
+        </p:nvCxnSpPr>
+        <p:spPr>
+          <a:xfrm>
+            <a:off x="6799784" y="3104930"/>
+            <a:ext cx="1366020" cy="0"/>
+          </a:xfrm>
+          <a:prstGeom prst="straightConnector1">
+            <a:avLst/>
+          </a:prstGeom>
+          <a:ln w="12700">
+            <a:solidFill>
+              <a:schemeClr val="tx1">
+                <a:lumMod val="50000"/>
+              </a:schemeClr>
+            </a:solidFill>
+            <a:tailEnd type="triangle"/>
+          </a:ln>
+        </p:spPr>
+        <p:style>
+          <a:lnRef idx="1">
+            <a:schemeClr val="accent1"/>
+          </a:lnRef>
+          <a:fillRef idx="0">
+            <a:schemeClr val="accent1"/>
+          </a:fillRef>
+          <a:effectRef idx="0">
+            <a:schemeClr val="accent1"/>
+          </a:effectRef>
+          <a:fontRef idx="minor">
+            <a:schemeClr val="tx1"/>
+          </a:fontRef>
+        </p:style>
+      </p:cxnSp>
+      <p:pic>
+        <p:nvPicPr>
+          <p:cNvPr id="7" name="Graphic 6" descr="Badge 1 with solid fill">
+            <a:extLst>
+              <a:ext uri="{FF2B5EF4-FFF2-40B4-BE49-F238E27FC236}">
+                <a16:creationId xmlns:a16="http://schemas.microsoft.com/office/drawing/2014/main" id="{0FBAE387-4E84-7F0D-2E7A-4A8A2F2ABC29}"/>
+              </a:ext>
+            </a:extLst>
+          </p:cNvPr>
+          <p:cNvPicPr>
+            <a:picLocks noChangeAspect="1"/>
+          </p:cNvPicPr>
+          <p:nvPr/>
+        </p:nvPicPr>
+        <p:blipFill>
+          <a:blip>
+            <a:extLst>
+              <a:ext uri="{96DAC541-7B7A-43D3-8B79-37D633B846F1}">
+                <asvg:svgBlip xmlns:asvg="http://schemas.microsoft.com/office/drawing/2016/SVG/main" r:embed="rId4"/>
               </a:ext>
             </a:extLst>
           </a:blip>
@@ -22704,6 +22816,332 @@
         </p:blipFill>
         <p:spPr>
           <a:xfrm>
+            <a:off x="1329654" y="3744605"/>
+            <a:ext cx="471263" cy="471263"/>
+          </a:xfrm>
+          <a:prstGeom prst="rect">
+            <a:avLst/>
+          </a:prstGeom>
+        </p:spPr>
+      </p:pic>
+      <p:pic>
+        <p:nvPicPr>
+          <p:cNvPr id="9" name="Graphic 8" descr="Badge with solid fill">
+            <a:extLst>
+              <a:ext uri="{FF2B5EF4-FFF2-40B4-BE49-F238E27FC236}">
+                <a16:creationId xmlns:a16="http://schemas.microsoft.com/office/drawing/2014/main" id="{6DC42205-2BF7-6471-2071-17B7A13A28FC}"/>
+              </a:ext>
+            </a:extLst>
+          </p:cNvPr>
+          <p:cNvPicPr>
+            <a:picLocks noChangeAspect="1"/>
+          </p:cNvPicPr>
+          <p:nvPr/>
+        </p:nvPicPr>
+        <p:blipFill>
+          <a:blip>
+            <a:extLst>
+              <a:ext uri="{96DAC541-7B7A-43D3-8B79-37D633B846F1}">
+                <asvg:svgBlip xmlns:asvg="http://schemas.microsoft.com/office/drawing/2016/SVG/main" r:embed="rId5"/>
+              </a:ext>
+            </a:extLst>
+          </a:blip>
+          <a:stretch>
+            <a:fillRect/>
+          </a:stretch>
+        </p:blipFill>
+        <p:spPr>
+          <a:xfrm>
+            <a:off x="2311601" y="4319258"/>
+            <a:ext cx="512103" cy="512103"/>
+          </a:xfrm>
+          <a:prstGeom prst="rect">
+            <a:avLst/>
+          </a:prstGeom>
+        </p:spPr>
+      </p:pic>
+      <p:pic>
+        <p:nvPicPr>
+          <p:cNvPr id="11" name="Graphic 10" descr="Badge 3 with solid fill">
+            <a:extLst>
+              <a:ext uri="{FF2B5EF4-FFF2-40B4-BE49-F238E27FC236}">
+                <a16:creationId xmlns:a16="http://schemas.microsoft.com/office/drawing/2014/main" id="{83C8C8FF-0FDE-0A72-B213-6FA79E561DDD}"/>
+              </a:ext>
+            </a:extLst>
+          </p:cNvPr>
+          <p:cNvPicPr>
+            <a:picLocks noChangeAspect="1"/>
+          </p:cNvPicPr>
+          <p:nvPr/>
+        </p:nvPicPr>
+        <p:blipFill>
+          <a:blip>
+            <a:extLst>
+              <a:ext uri="{96DAC541-7B7A-43D3-8B79-37D633B846F1}">
+                <asvg:svgBlip xmlns:asvg="http://schemas.microsoft.com/office/drawing/2016/SVG/main" r:embed="rId6"/>
+              </a:ext>
+            </a:extLst>
+          </a:blip>
+          <a:stretch>
+            <a:fillRect/>
+          </a:stretch>
+        </p:blipFill>
+        <p:spPr>
+          <a:xfrm>
+            <a:off x="4523800" y="3460909"/>
+            <a:ext cx="666305" cy="666305"/>
+          </a:xfrm>
+          <a:prstGeom prst="rect">
+            <a:avLst/>
+          </a:prstGeom>
+        </p:spPr>
+      </p:pic>
+      <p:pic>
+        <p:nvPicPr>
+          <p:cNvPr id="20" name="Graphic 19" descr="Badge 4 with solid fill">
+            <a:extLst>
+              <a:ext uri="{FF2B5EF4-FFF2-40B4-BE49-F238E27FC236}">
+                <a16:creationId xmlns:a16="http://schemas.microsoft.com/office/drawing/2014/main" id="{6AE822AD-F4EB-0824-5B29-74BDE302CBDD}"/>
+              </a:ext>
+            </a:extLst>
+          </p:cNvPr>
+          <p:cNvPicPr>
+            <a:picLocks noChangeAspect="1"/>
+          </p:cNvPicPr>
+          <p:nvPr/>
+        </p:nvPicPr>
+        <p:blipFill>
+          <a:blip>
+            <a:extLst>
+              <a:ext uri="{96DAC541-7B7A-43D3-8B79-37D633B846F1}">
+                <asvg:svgBlip xmlns:asvg="http://schemas.microsoft.com/office/drawing/2016/SVG/main" r:embed="rId7"/>
+              </a:ext>
+            </a:extLst>
+          </a:blip>
+          <a:stretch>
+            <a:fillRect/>
+          </a:stretch>
+        </p:blipFill>
+        <p:spPr>
+          <a:xfrm>
+            <a:off x="6452477" y="2242158"/>
+            <a:ext cx="666305" cy="666305"/>
+          </a:xfrm>
+          <a:prstGeom prst="rect">
+            <a:avLst/>
+          </a:prstGeom>
+        </p:spPr>
+      </p:pic>
+      <p:pic>
+        <p:nvPicPr>
+          <p:cNvPr id="22" name="Graphic 21" descr="Badge 5 with solid fill">
+            <a:extLst>
+              <a:ext uri="{FF2B5EF4-FFF2-40B4-BE49-F238E27FC236}">
+                <a16:creationId xmlns:a16="http://schemas.microsoft.com/office/drawing/2014/main" id="{73FD95FE-E408-F702-2518-A6537339AE3F}"/>
+              </a:ext>
+            </a:extLst>
+          </p:cNvPr>
+          <p:cNvPicPr>
+            <a:picLocks noChangeAspect="1"/>
+          </p:cNvPicPr>
+          <p:nvPr/>
+        </p:nvPicPr>
+        <p:blipFill>
+          <a:blip>
+            <a:extLst>
+              <a:ext uri="{96DAC541-7B7A-43D3-8B79-37D633B846F1}">
+                <asvg:svgBlip xmlns:asvg="http://schemas.microsoft.com/office/drawing/2016/SVG/main" r:embed="rId8"/>
+              </a:ext>
+            </a:extLst>
+          </a:blip>
+          <a:stretch>
+            <a:fillRect/>
+          </a:stretch>
+        </p:blipFill>
+        <p:spPr>
+          <a:xfrm>
+            <a:off x="7835587" y="2245095"/>
+            <a:ext cx="660433" cy="660433"/>
+          </a:xfrm>
+          <a:prstGeom prst="rect">
+            <a:avLst/>
+          </a:prstGeom>
+        </p:spPr>
+      </p:pic>
+      <p:pic>
+        <p:nvPicPr>
+          <p:cNvPr id="25" name="Graphic 24" descr="Badge 6 with solid fill">
+            <a:extLst>
+              <a:ext uri="{FF2B5EF4-FFF2-40B4-BE49-F238E27FC236}">
+                <a16:creationId xmlns:a16="http://schemas.microsoft.com/office/drawing/2014/main" id="{C1A7BF82-A7EA-A1B4-88E8-2E47E4DAAA86}"/>
+              </a:ext>
+            </a:extLst>
+          </p:cNvPr>
+          <p:cNvPicPr>
+            <a:picLocks noChangeAspect="1"/>
+          </p:cNvPicPr>
+          <p:nvPr/>
+        </p:nvPicPr>
+        <p:blipFill>
+          <a:blip>
+            <a:extLst>
+              <a:ext uri="{96DAC541-7B7A-43D3-8B79-37D633B846F1}">
+                <asvg:svgBlip xmlns:asvg="http://schemas.microsoft.com/office/drawing/2016/SVG/main" r:embed="rId9"/>
+              </a:ext>
+            </a:extLst>
+          </a:blip>
+          <a:stretch>
+            <a:fillRect/>
+          </a:stretch>
+        </p:blipFill>
+        <p:spPr>
+          <a:xfrm>
+            <a:off x="9819436" y="2230704"/>
+            <a:ext cx="689215" cy="689215"/>
+          </a:xfrm>
+          <a:prstGeom prst="rect">
+            <a:avLst/>
+          </a:prstGeom>
+        </p:spPr>
+      </p:pic>
+      <p:pic>
+        <p:nvPicPr>
+          <p:cNvPr id="8" name="Picture 7">
+            <a:extLst>
+              <a:ext uri="{FF2B5EF4-FFF2-40B4-BE49-F238E27FC236}">
+                <a16:creationId xmlns:a16="http://schemas.microsoft.com/office/drawing/2014/main" id="{491BA644-CE38-DEE0-3E5C-9BE9BC1C25D2}"/>
+              </a:ext>
+            </a:extLst>
+          </p:cNvPr>
+          <p:cNvPicPr>
+            <a:picLocks noChangeAspect="1"/>
+          </p:cNvPicPr>
+          <p:nvPr/>
+        </p:nvPicPr>
+        <p:blipFill>
+          <a:blip r:embed="rId10">
+            <a:clrChange>
+              <a:clrFrom>
+                <a:srgbClr val="FEFEFE"/>
+              </a:clrFrom>
+              <a:clrTo>
+                <a:srgbClr val="FEFEFE">
+                  <a:alpha val="0"/>
+                </a:srgbClr>
+              </a:clrTo>
+            </a:clrChange>
+            <a:extLst>
+              <a:ext uri="{28A0092B-C50C-407E-A947-70E740481C1C}">
+                <a14:useLocalDpi xmlns:a14="http://schemas.microsoft.com/office/drawing/2010/main" val="0"/>
+              </a:ext>
+            </a:extLst>
+          </a:blip>
+          <a:stretch>
+            <a:fillRect/>
+          </a:stretch>
+        </p:blipFill>
+        <p:spPr>
+          <a:xfrm>
+            <a:off x="689609" y="2237041"/>
+            <a:ext cx="1464204" cy="1545927"/>
+          </a:xfrm>
+          <a:prstGeom prst="rect">
+            <a:avLst/>
+          </a:prstGeom>
+        </p:spPr>
+      </p:pic>
+    </p:spTree>
+    <p:extLst>
+      <p:ext uri="{BB962C8B-B14F-4D97-AF65-F5344CB8AC3E}">
+        <p14:creationId xmlns:p14="http://schemas.microsoft.com/office/powerpoint/2010/main" val="4147820856"/>
+      </p:ext>
+    </p:extLst>
+  </p:cSld>
+  <p:clrMapOvr>
+    <a:masterClrMapping/>
+  </p:clrMapOvr>
+</p:sld>
+</file>
+
+<file path=ppt/slides/slide8.xml><?xml version="1.0" encoding="utf-8"?>
+<p:sld xmlns:a="http://schemas.openxmlformats.org/drawingml/2006/main" xmlns:r="http://schemas.openxmlformats.org/officeDocument/2006/relationships" xmlns:p="http://schemas.openxmlformats.org/presentationml/2006/main">
+  <p:cSld>
+    <p:spTree>
+      <p:nvGrpSpPr>
+        <p:cNvPr id="1" name=""/>
+        <p:cNvGrpSpPr/>
+        <p:nvPr/>
+      </p:nvGrpSpPr>
+      <p:grpSpPr>
+        <a:xfrm>
+          <a:off x="0" y="0"/>
+          <a:ext cx="0" cy="0"/>
+          <a:chOff x="0" y="0"/>
+          <a:chExt cx="0" cy="0"/>
+        </a:xfrm>
+      </p:grpSpPr>
+      <p:sp>
+        <p:nvSpPr>
+          <p:cNvPr id="2" name="Title 1">
+            <a:extLst>
+              <a:ext uri="{FF2B5EF4-FFF2-40B4-BE49-F238E27FC236}">
+                <a16:creationId xmlns:a16="http://schemas.microsoft.com/office/drawing/2014/main" id="{521ED363-89EF-6C7E-F8F6-95F0B7DD33AF}"/>
+              </a:ext>
+            </a:extLst>
+          </p:cNvPr>
+          <p:cNvSpPr>
+            <a:spLocks noGrp="1"/>
+          </p:cNvSpPr>
+          <p:nvPr>
+            <p:ph type="title"/>
+          </p:nvPr>
+        </p:nvSpPr>
+        <p:spPr/>
+        <p:txBody>
+          <a:bodyPr/>
+          <a:lstStyle/>
+          <a:p>
+            <a:r>
+              <a:rPr lang="en-US" dirty="0" err="1"/>
+              <a:t>Voorbeeld</a:t>
+            </a:r>
+            <a:r>
+              <a:rPr lang="en-US" dirty="0"/>
+              <a:t> setup</a:t>
+            </a:r>
+          </a:p>
+        </p:txBody>
+      </p:sp>
+      <p:pic>
+        <p:nvPicPr>
+          <p:cNvPr id="6" name="Content Placeholder 5">
+            <a:extLst>
+              <a:ext uri="{FF2B5EF4-FFF2-40B4-BE49-F238E27FC236}">
+                <a16:creationId xmlns:a16="http://schemas.microsoft.com/office/drawing/2014/main" id="{5F2ABBB8-47D7-2001-6400-A835E2305031}"/>
+              </a:ext>
+            </a:extLst>
+          </p:cNvPr>
+          <p:cNvPicPr>
+            <a:picLocks noGrp="1" noChangeAspect="1"/>
+          </p:cNvPicPr>
+          <p:nvPr>
+            <p:ph sz="half" idx="1"/>
+          </p:nvPr>
+        </p:nvPicPr>
+        <p:blipFill>
+          <a:blip r:embed="rId2">
+            <a:extLst>
+              <a:ext uri="{28A0092B-C50C-407E-A947-70E740481C1C}">
+                <a14:useLocalDpi xmlns:a14="http://schemas.microsoft.com/office/drawing/2010/main" val="0"/>
+              </a:ext>
+            </a:extLst>
+          </a:blip>
+          <a:stretch>
+            <a:fillRect/>
+          </a:stretch>
+        </p:blipFill>
+        <p:spPr>
+          <a:xfrm>
             <a:off x="300038" y="2758745"/>
             <a:ext cx="5651500" cy="2456523"/>
           </a:xfrm>
@@ -22846,7 +23284,7 @@
           <a:p>
             <a:fld id="{A648B885-FF76-47CB-8BBD-27E7EBF07CA9}" type="slidenum">
               <a:rPr lang="nl-NL" smtClean="0"/>
-              <a:t>7</a:t>
+              <a:t>8</a:t>
             </a:fld>
             <a:endParaRPr lang="nl-NL"/>
           </a:p>
@@ -22865,7 +23303,7 @@
 </p:sld>
 </file>
 
-<file path=ppt/slides/slide8.xml><?xml version="1.0" encoding="utf-8"?>
+<file path=ppt/slides/slide9.xml><?xml version="1.0" encoding="utf-8"?>
 <p:sld xmlns:a="http://schemas.openxmlformats.org/drawingml/2006/main" xmlns:r="http://schemas.openxmlformats.org/officeDocument/2006/relationships" xmlns:p="http://schemas.openxmlformats.org/presentationml/2006/main">
   <p:cSld>
     <p:spTree>
@@ -23044,7 +23482,7 @@
           <a:p>
             <a:fld id="{A648B885-FF76-47CB-8BBD-27E7EBF07CA9}" type="slidenum">
               <a:rPr lang="nl-NL" smtClean="0"/>
-              <a:t>8</a:t>
+              <a:t>9</a:t>
             </a:fld>
             <a:endParaRPr lang="nl-NL"/>
           </a:p>
@@ -23054,274 +23492,6 @@
     <p:extLst>
       <p:ext uri="{BB962C8B-B14F-4D97-AF65-F5344CB8AC3E}">
         <p14:creationId xmlns:p14="http://schemas.microsoft.com/office/powerpoint/2010/main" val="1740635505"/>
-      </p:ext>
-    </p:extLst>
-  </p:cSld>
-  <p:clrMapOvr>
-    <a:masterClrMapping/>
-  </p:clrMapOvr>
-</p:sld>
-</file>
-
-<file path=ppt/slides/slide9.xml><?xml version="1.0" encoding="utf-8"?>
-<p:sld xmlns:a="http://schemas.openxmlformats.org/drawingml/2006/main" xmlns:r="http://schemas.openxmlformats.org/officeDocument/2006/relationships" xmlns:p="http://schemas.openxmlformats.org/presentationml/2006/main">
-  <p:cSld>
-    <p:spTree>
-      <p:nvGrpSpPr>
-        <p:cNvPr id="1" name="">
-          <a:extLst>
-            <a:ext uri="{FF2B5EF4-FFF2-40B4-BE49-F238E27FC236}">
-              <a16:creationId xmlns:a16="http://schemas.microsoft.com/office/drawing/2014/main" id="{8215E91A-8BFF-1795-34EB-EB0AF08307E8}"/>
-            </a:ext>
-          </a:extLst>
-        </p:cNvPr>
-        <p:cNvGrpSpPr/>
-        <p:nvPr/>
-      </p:nvGrpSpPr>
-      <p:grpSpPr>
-        <a:xfrm>
-          <a:off x="0" y="0"/>
-          <a:ext cx="0" cy="0"/>
-          <a:chOff x="0" y="0"/>
-          <a:chExt cx="0" cy="0"/>
-        </a:xfrm>
-      </p:grpSpPr>
-      <p:sp>
-        <p:nvSpPr>
-          <p:cNvPr id="2" name="Title 1">
-            <a:extLst>
-              <a:ext uri="{FF2B5EF4-FFF2-40B4-BE49-F238E27FC236}">
-                <a16:creationId xmlns:a16="http://schemas.microsoft.com/office/drawing/2014/main" id="{D2CFC240-5F5D-62A9-41F2-99F67D54213C}"/>
-              </a:ext>
-            </a:extLst>
-          </p:cNvPr>
-          <p:cNvSpPr>
-            <a:spLocks noGrp="1"/>
-          </p:cNvSpPr>
-          <p:nvPr>
-            <p:ph type="title"/>
-          </p:nvPr>
-        </p:nvSpPr>
-        <p:spPr/>
-        <p:txBody>
-          <a:bodyPr/>
-          <a:lstStyle/>
-          <a:p>
-            <a:r>
-              <a:rPr lang="nl-NL" dirty="0" err="1"/>
-              <a:t>IoT</a:t>
-            </a:r>
-            <a:r>
-              <a:rPr lang="nl-NL" dirty="0"/>
-              <a:t> </a:t>
-            </a:r>
-            <a:r>
-              <a:rPr lang="nl-NL" dirty="0" err="1"/>
-              <a:t>Sensing</a:t>
-            </a:r>
-            <a:r>
-              <a:rPr lang="nl-NL" dirty="0"/>
-              <a:t> - Transmission</a:t>
-            </a:r>
-          </a:p>
-        </p:txBody>
-      </p:sp>
-      <p:sp>
-        <p:nvSpPr>
-          <p:cNvPr id="3" name="Content Placeholder 2">
-            <a:extLst>
-              <a:ext uri="{FF2B5EF4-FFF2-40B4-BE49-F238E27FC236}">
-                <a16:creationId xmlns:a16="http://schemas.microsoft.com/office/drawing/2014/main" id="{800C710A-DF59-EBB8-3041-87346E911D90}"/>
-              </a:ext>
-            </a:extLst>
-          </p:cNvPr>
-          <p:cNvSpPr>
-            <a:spLocks noGrp="1"/>
-          </p:cNvSpPr>
-          <p:nvPr>
-            <p:ph idx="1"/>
-          </p:nvPr>
-        </p:nvSpPr>
-        <p:spPr>
-          <a:xfrm>
-            <a:off x="300038" y="1520825"/>
-            <a:ext cx="11587855" cy="5301130"/>
-          </a:xfrm>
-        </p:spPr>
-        <p:txBody>
-          <a:bodyPr>
-            <a:normAutofit fontScale="92500" lnSpcReduction="20000"/>
-          </a:bodyPr>
-          <a:lstStyle/>
-          <a:p>
-            <a:r>
-              <a:rPr lang="en-US" dirty="0"/>
-              <a:t>Short-Range Wireless </a:t>
-            </a:r>
-          </a:p>
-          <a:p>
-            <a:pPr lvl="1"/>
-            <a:r>
-              <a:rPr lang="nl-NL" noProof="0" dirty="0" err="1"/>
-              <a:t>Wi</a:t>
-            </a:r>
-            <a:r>
-              <a:rPr lang="nl-NL" noProof="0" dirty="0"/>
-              <a:t>-</a:t>
-            </a:r>
-            <a:r>
-              <a:rPr lang="nl-NL" dirty="0" err="1"/>
-              <a:t>Fi</a:t>
-            </a:r>
-            <a:r>
-              <a:rPr lang="nl-NL" dirty="0"/>
-              <a:t> (IEEE 802.11)</a:t>
-            </a:r>
-          </a:p>
-          <a:p>
-            <a:pPr lvl="1"/>
-            <a:r>
-              <a:rPr lang="nl-NL" noProof="0" dirty="0"/>
-              <a:t>Bluetooth</a:t>
-            </a:r>
-          </a:p>
-          <a:p>
-            <a:pPr lvl="1"/>
-            <a:r>
-              <a:rPr lang="en-US" dirty="0"/>
-              <a:t>Zigbee / Z-Wave / Thread</a:t>
-            </a:r>
-          </a:p>
-          <a:p>
-            <a:r>
-              <a:rPr lang="en-US" noProof="0" dirty="0" err="1"/>
-              <a:t>LowPowerWAN</a:t>
-            </a:r>
-            <a:endParaRPr lang="en-US" noProof="0" dirty="0"/>
-          </a:p>
-          <a:p>
-            <a:pPr lvl="1"/>
-            <a:r>
-              <a:rPr lang="en-US" dirty="0" err="1"/>
-              <a:t>LoRaWAN</a:t>
-            </a:r>
-            <a:endParaRPr lang="en-US" dirty="0"/>
-          </a:p>
-          <a:p>
-            <a:pPr lvl="1"/>
-            <a:r>
-              <a:rPr lang="en-US" noProof="0" dirty="0"/>
-              <a:t>NB-IoT</a:t>
-            </a:r>
-          </a:p>
-          <a:p>
-            <a:pPr lvl="1"/>
-            <a:r>
-              <a:rPr lang="en-US" dirty="0"/>
-              <a:t>LTE-M</a:t>
-            </a:r>
-          </a:p>
-          <a:p>
-            <a:pPr lvl="1"/>
-            <a:r>
-              <a:rPr lang="en-US" noProof="0" dirty="0"/>
-              <a:t>Sigfox</a:t>
-            </a:r>
-          </a:p>
-          <a:p>
-            <a:r>
-              <a:rPr lang="en-US" dirty="0" err="1"/>
-              <a:t>Cellulaire</a:t>
-            </a:r>
-            <a:endParaRPr lang="en-US" dirty="0"/>
-          </a:p>
-          <a:p>
-            <a:pPr lvl="1"/>
-            <a:r>
-              <a:rPr lang="en-US" noProof="0" dirty="0"/>
-              <a:t>4G LTE / 5G</a:t>
-            </a:r>
-          </a:p>
-          <a:p>
-            <a:r>
-              <a:rPr lang="nl-NL" noProof="0" dirty="0"/>
-              <a:t>Nabij – </a:t>
-            </a:r>
-            <a:r>
-              <a:rPr lang="en-US" dirty="0" err="1"/>
-              <a:t>Bekabelde</a:t>
-            </a:r>
-            <a:r>
-              <a:rPr lang="en-US" dirty="0"/>
-              <a:t> </a:t>
-            </a:r>
-            <a:r>
-              <a:rPr lang="en-US" dirty="0" err="1"/>
-              <a:t>Netwerken</a:t>
-            </a:r>
-            <a:endParaRPr lang="nl-NL" noProof="0" dirty="0"/>
-          </a:p>
-          <a:p>
-            <a:pPr lvl="1"/>
-            <a:r>
-              <a:rPr lang="en-US" dirty="0"/>
-              <a:t>RFID &amp; NFC</a:t>
-            </a:r>
-          </a:p>
-          <a:p>
-            <a:pPr lvl="1"/>
-            <a:r>
-              <a:rPr lang="en-US" dirty="0"/>
-              <a:t>Ethernet</a:t>
-            </a:r>
-          </a:p>
-          <a:p>
-            <a:pPr lvl="1"/>
-            <a:r>
-              <a:rPr lang="en-US" dirty="0" err="1"/>
-              <a:t>Satelliet</a:t>
-            </a:r>
-            <a:r>
-              <a:rPr lang="en-US" dirty="0"/>
-              <a:t> IoT</a:t>
-            </a:r>
-            <a:endParaRPr lang="nl-NL" noProof="0" dirty="0"/>
-          </a:p>
-        </p:txBody>
-      </p:sp>
-      <p:sp>
-        <p:nvSpPr>
-          <p:cNvPr id="4" name="Slide Number Placeholder 3">
-            <a:extLst>
-              <a:ext uri="{FF2B5EF4-FFF2-40B4-BE49-F238E27FC236}">
-                <a16:creationId xmlns:a16="http://schemas.microsoft.com/office/drawing/2014/main" id="{5A10C5C3-51A7-BA7C-F0A3-1E1B890D9E42}"/>
-              </a:ext>
-            </a:extLst>
-          </p:cNvPr>
-          <p:cNvSpPr>
-            <a:spLocks noGrp="1"/>
-          </p:cNvSpPr>
-          <p:nvPr>
-            <p:ph type="sldNum" sz="quarter" idx="12"/>
-          </p:nvPr>
-        </p:nvSpPr>
-        <p:spPr/>
-        <p:txBody>
-          <a:bodyPr/>
-          <a:lstStyle/>
-          <a:p>
-            <a:fld id="{A648B885-FF76-47CB-8BBD-27E7EBF07CA9}" type="slidenum">
-              <a:rPr lang="nl-NL" smtClean="0"/>
-              <a:t>9</a:t>
-            </a:fld>
-            <a:endParaRPr lang="nl-NL"/>
-          </a:p>
-        </p:txBody>
-      </p:sp>
-    </p:spTree>
-    <p:extLst>
-      <p:ext uri="{BB962C8B-B14F-4D97-AF65-F5344CB8AC3E}">
-        <p14:creationId xmlns:p14="http://schemas.microsoft.com/office/powerpoint/2010/main" val="1296492307"/>
       </p:ext>
     </p:extLst>
   </p:cSld>
